--- a/evidence-room/04_AP_AGENT_OS_TEAM/Decks/ER_Workshop_Deck.pptx
+++ b/evidence-room/04_AP_AGENT_OS_TEAM/Decks/ER_Workshop_Deck.pptx
@@ -8,6 +8,16 @@
     <p:sldId id="256" r:id="rId7"/>
     <p:sldId id="257" r:id="rId8"/>
     <p:sldId id="258" r:id="rId9"/>
+    <p:sldId id="259" r:id="rId10"/>
+    <p:sldId id="260" r:id="rId11"/>
+    <p:sldId id="261" r:id="rId12"/>
+    <p:sldId id="262" r:id="rId13"/>
+    <p:sldId id="263" r:id="rId14"/>
+    <p:sldId id="264" r:id="rId15"/>
+    <p:sldId id="265" r:id="rId16"/>
+    <p:sldId id="266" r:id="rId17"/>
+    <p:sldId id="267" r:id="rId18"/>
+    <p:sldId id="268" r:id="rId19"/>
   </p:sldIdLst>
   <p:sldSz cx="9144000" cy="6858000" type="screen4x3"/>
   <p:notesSz cx="6858000" cy="9144000"/>
@@ -3092,20 +3102,198 @@
       <p:grpSpPr/>
       <p:sp>
         <p:nvSpPr>
-          <p:cNvPr id="2" name="Title 1"/>
-          <p:cNvSpPr>
-            <a:spLocks noGrp="1"/>
-          </p:cNvSpPr>
-          <p:nvPr>
-            <p:ph type="ctrTitle"/>
-          </p:nvPr>
-        </p:nvSpPr>
-        <p:spPr/>
-        <p:txBody>
-          <a:bodyPr/>
-          <a:lstStyle/>
-          <a:p>
-            <a:r>
+          <p:cNvPr id="2" name="Rectangle 1"/>
+          <p:cNvSpPr/>
+          <p:nvPr/>
+        </p:nvSpPr>
+        <p:spPr>
+          <a:xfrm>
+            <a:off x="0" y="0"/>
+            <a:ext cx="9144000" cy="6858000"/>
+          </a:xfrm>
+          <a:prstGeom prst="rect">
+            <a:avLst/>
+          </a:prstGeom>
+          <a:solidFill>
+            <a:srgbClr val="F3EEE4"/>
+          </a:solidFill>
+          <a:ln>
+            <a:noFill/>
+          </a:ln>
+        </p:spPr>
+        <p:style>
+          <a:lnRef idx="1">
+            <a:schemeClr val="accent1"/>
+          </a:lnRef>
+          <a:fillRef idx="3">
+            <a:schemeClr val="accent1"/>
+          </a:fillRef>
+          <a:effectRef idx="2">
+            <a:schemeClr val="accent1"/>
+          </a:effectRef>
+          <a:fontRef idx="minor">
+            <a:schemeClr val="lt1"/>
+          </a:fontRef>
+        </p:style>
+        <p:txBody>
+          <a:bodyPr rtlCol="0" anchor="ctr"/>
+          <a:lstStyle/>
+          <a:p>
+            <a:pPr algn="ctr"/>
+          </a:p>
+        </p:txBody>
+      </p:sp>
+      <p:sp>
+        <p:nvSpPr>
+          <p:cNvPr id="3" name="Rectangle 2"/>
+          <p:cNvSpPr/>
+          <p:nvPr/>
+        </p:nvSpPr>
+        <p:spPr>
+          <a:xfrm>
+            <a:off x="457200" y="640080"/>
+            <a:ext cx="347472" cy="347472"/>
+          </a:xfrm>
+          <a:prstGeom prst="rect">
+            <a:avLst/>
+          </a:prstGeom>
+          <a:solidFill>
+            <a:srgbClr val="F3EEE4"/>
+          </a:solidFill>
+          <a:ln>
+            <a:noFill/>
+          </a:ln>
+        </p:spPr>
+        <p:style>
+          <a:lnRef idx="1">
+            <a:schemeClr val="accent1"/>
+          </a:lnRef>
+          <a:fillRef idx="3">
+            <a:schemeClr val="accent1"/>
+          </a:fillRef>
+          <a:effectRef idx="2">
+            <a:schemeClr val="accent1"/>
+          </a:effectRef>
+          <a:fontRef idx="minor">
+            <a:schemeClr val="lt1"/>
+          </a:fontRef>
+        </p:style>
+        <p:txBody>
+          <a:bodyPr rtlCol="0" anchor="ctr"/>
+          <a:lstStyle/>
+          <a:p>
+            <a:pPr algn="ctr"/>
+          </a:p>
+        </p:txBody>
+      </p:sp>
+      <p:sp>
+        <p:nvSpPr>
+          <p:cNvPr id="4" name="Rectangle 3"/>
+          <p:cNvSpPr/>
+          <p:nvPr/>
+        </p:nvSpPr>
+        <p:spPr>
+          <a:xfrm>
+            <a:off x="457200" y="640080"/>
+            <a:ext cx="347472" cy="347472"/>
+          </a:xfrm>
+          <a:prstGeom prst="rect">
+            <a:avLst/>
+          </a:prstGeom>
+          <a:noFill/>
+          <a:ln w="12700">
+            <a:solidFill>
+              <a:srgbClr val="B0893E"/>
+            </a:solidFill>
+          </a:ln>
+        </p:spPr>
+        <p:style>
+          <a:lnRef idx="1">
+            <a:schemeClr val="accent1"/>
+          </a:lnRef>
+          <a:fillRef idx="3">
+            <a:schemeClr val="accent1"/>
+          </a:fillRef>
+          <a:effectRef idx="2">
+            <a:schemeClr val="accent1"/>
+          </a:effectRef>
+          <a:fontRef idx="minor">
+            <a:schemeClr val="lt1"/>
+          </a:fontRef>
+        </p:style>
+        <p:txBody>
+          <a:bodyPr rtlCol="0" anchor="ctr"/>
+          <a:lstStyle/>
+          <a:p>
+            <a:pPr algn="ctr"/>
+          </a:p>
+        </p:txBody>
+      </p:sp>
+      <p:sp>
+        <p:nvSpPr>
+          <p:cNvPr id="5" name="TextBox 4"/>
+          <p:cNvSpPr txBox="1"/>
+          <p:nvPr/>
+        </p:nvSpPr>
+        <p:spPr>
+          <a:xfrm>
+            <a:off x="457200" y="1280160"/>
+            <a:ext cx="8229600" cy="320040"/>
+          </a:xfrm>
+          <a:prstGeom prst="rect">
+            <a:avLst/>
+          </a:prstGeom>
+          <a:noFill/>
+        </p:spPr>
+        <p:txBody>
+          <a:bodyPr wrap="square">
+            <a:spAutoFit/>
+          </a:bodyPr>
+          <a:lstStyle/>
+          <a:p>
+            <a:pPr algn="l"/>
+            <a:r>
+              <a:rPr sz="1200" b="1">
+                <a:solidFill>
+                  <a:srgbClr val="B0893E"/>
+                </a:solidFill>
+                <a:latin typeface="Calibri"/>
+              </a:rPr>
+              <a:t>TEAM EDITION · ONE DAY</a:t>
+            </a:r>
+          </a:p>
+        </p:txBody>
+      </p:sp>
+      <p:sp>
+        <p:nvSpPr>
+          <p:cNvPr id="6" name="TextBox 5"/>
+          <p:cNvSpPr txBox="1"/>
+          <p:nvPr/>
+        </p:nvSpPr>
+        <p:spPr>
+          <a:xfrm>
+            <a:off x="457200" y="1737360"/>
+            <a:ext cx="8229600" cy="2011680"/>
+          </a:xfrm>
+          <a:prstGeom prst="rect">
+            <a:avLst/>
+          </a:prstGeom>
+          <a:noFill/>
+        </p:spPr>
+        <p:txBody>
+          <a:bodyPr wrap="square">
+            <a:spAutoFit/>
+          </a:bodyPr>
+          <a:lstStyle/>
+          <a:p>
+            <a:pPr algn="l"/>
+            <a:r>
+              <a:rPr sz="3600" b="0">
+                <a:solidFill>
+                  <a:srgbClr val="12160F"/>
+                </a:solidFill>
+                <a:latin typeface="Georgia"/>
+              </a:rPr>
               <a:t>AP Agent OS workshop</a:t>
             </a:r>
           </a:p>
@@ -3113,26 +3301,1373 @@
       </p:sp>
       <p:sp>
         <p:nvSpPr>
-          <p:cNvPr id="3" name="Subtitle 2"/>
-          <p:cNvSpPr>
-            <a:spLocks noGrp="1"/>
-          </p:cNvSpPr>
-          <p:nvPr>
-            <p:ph type="subTitle" idx="1"/>
-          </p:nvPr>
-        </p:nvSpPr>
-        <p:spPr/>
-        <p:txBody>
-          <a:bodyPr/>
-          <a:lstStyle/>
-          <a:p>
-            <a:r>
-              <a:t>TEAM EDITION</a:t>
-            </a:r>
-          </a:p>
-          <a:p>
-            <a:r>
-              <a:t>One day. One path. No unofficial permission.</a:t>
+          <p:cNvPr id="7" name="TextBox 6"/>
+          <p:cNvSpPr txBox="1"/>
+          <p:nvPr/>
+        </p:nvSpPr>
+        <p:spPr>
+          <a:xfrm>
+            <a:off x="457200" y="4023360"/>
+            <a:ext cx="7772400" cy="1097280"/>
+          </a:xfrm>
+          <a:prstGeom prst="rect">
+            <a:avLst/>
+          </a:prstGeom>
+          <a:noFill/>
+        </p:spPr>
+        <p:txBody>
+          <a:bodyPr wrap="square">
+            <a:spAutoFit/>
+          </a:bodyPr>
+          <a:lstStyle/>
+          <a:p>
+            <a:pPr algn="l"/>
+            <a:r>
+              <a:rPr sz="1600" b="0">
+                <a:solidFill>
+                  <a:srgbClr val="5A6154"/>
+                </a:solidFill>
+                <a:latin typeface="Calibri"/>
+              </a:rPr>
+              <a:t>One path. Six draft charters. A written payment sentence. No unofficial permission.</a:t>
+            </a:r>
+          </a:p>
+        </p:txBody>
+      </p:sp>
+      <p:sp>
+        <p:nvSpPr>
+          <p:cNvPr id="8" name="TextBox 7"/>
+          <p:cNvSpPr txBox="1"/>
+          <p:nvPr/>
+        </p:nvSpPr>
+        <p:spPr>
+          <a:xfrm>
+            <a:off x="457200" y="6217920"/>
+            <a:ext cx="8229600" cy="274320"/>
+          </a:xfrm>
+          <a:prstGeom prst="rect">
+            <a:avLst/>
+          </a:prstGeom>
+          <a:noFill/>
+        </p:spPr>
+        <p:txBody>
+          <a:bodyPr wrap="square">
+            <a:spAutoFit/>
+          </a:bodyPr>
+          <a:lstStyle/>
+          <a:p>
+            <a:pPr algn="l"/>
+            <a:r>
+              <a:rPr sz="1100" b="0">
+                <a:solidFill>
+                  <a:srgbClr val="5A6154"/>
+                </a:solidFill>
+                <a:latin typeface="Calibri"/>
+              </a:rPr>
+              <a:t>Proof before permission.  ·  Working draft. Not a forecast.</a:t>
+            </a:r>
+          </a:p>
+        </p:txBody>
+      </p:sp>
+    </p:spTree>
+  </p:cSld>
+  <p:clrMapOvr>
+    <a:masterClrMapping/>
+  </p:clrMapOvr>
+</p:sld>
+</file>
+
+<file path=ppt/slides/slide10.xml><?xml version="1.0" encoding="utf-8"?>
+<p:sld xmlns:a="http://schemas.openxmlformats.org/drawingml/2006/main" xmlns:p="http://schemas.openxmlformats.org/presentationml/2006/main" xmlns:r="http://schemas.openxmlformats.org/officeDocument/2006/relationships">
+  <p:cSld>
+    <p:spTree>
+      <p:nvGrpSpPr>
+        <p:cNvPr id="1" name=""/>
+        <p:cNvGrpSpPr/>
+        <p:nvPr/>
+      </p:nvGrpSpPr>
+      <p:grpSpPr/>
+      <p:sp>
+        <p:nvSpPr>
+          <p:cNvPr id="2" name="Rectangle 1"/>
+          <p:cNvSpPr/>
+          <p:nvPr/>
+        </p:nvSpPr>
+        <p:spPr>
+          <a:xfrm>
+            <a:off x="0" y="0"/>
+            <a:ext cx="9144000" cy="6858000"/>
+          </a:xfrm>
+          <a:prstGeom prst="rect">
+            <a:avLst/>
+          </a:prstGeom>
+          <a:solidFill>
+            <a:srgbClr val="F3EEE4"/>
+          </a:solidFill>
+          <a:ln>
+            <a:noFill/>
+          </a:ln>
+        </p:spPr>
+        <p:style>
+          <a:lnRef idx="1">
+            <a:schemeClr val="accent1"/>
+          </a:lnRef>
+          <a:fillRef idx="3">
+            <a:schemeClr val="accent1"/>
+          </a:fillRef>
+          <a:effectRef idx="2">
+            <a:schemeClr val="accent1"/>
+          </a:effectRef>
+          <a:fontRef idx="minor">
+            <a:schemeClr val="lt1"/>
+          </a:fontRef>
+        </p:style>
+        <p:txBody>
+          <a:bodyPr rtlCol="0" anchor="ctr"/>
+          <a:lstStyle/>
+          <a:p>
+            <a:pPr algn="ctr"/>
+          </a:p>
+        </p:txBody>
+      </p:sp>
+      <p:sp>
+        <p:nvSpPr>
+          <p:cNvPr id="3" name="Rectangle 2"/>
+          <p:cNvSpPr/>
+          <p:nvPr/>
+        </p:nvSpPr>
+        <p:spPr>
+          <a:xfrm>
+            <a:off x="0" y="0"/>
+            <a:ext cx="73152" cy="6858000"/>
+          </a:xfrm>
+          <a:prstGeom prst="rect">
+            <a:avLst/>
+          </a:prstGeom>
+          <a:solidFill>
+            <a:srgbClr val="B0893E"/>
+          </a:solidFill>
+          <a:ln>
+            <a:noFill/>
+          </a:ln>
+        </p:spPr>
+        <p:style>
+          <a:lnRef idx="1">
+            <a:schemeClr val="accent1"/>
+          </a:lnRef>
+          <a:fillRef idx="3">
+            <a:schemeClr val="accent1"/>
+          </a:fillRef>
+          <a:effectRef idx="2">
+            <a:schemeClr val="accent1"/>
+          </a:effectRef>
+          <a:fontRef idx="minor">
+            <a:schemeClr val="lt1"/>
+          </a:fontRef>
+        </p:style>
+        <p:txBody>
+          <a:bodyPr rtlCol="0" anchor="ctr"/>
+          <a:lstStyle/>
+          <a:p>
+            <a:pPr algn="ctr"/>
+          </a:p>
+        </p:txBody>
+      </p:sp>
+      <p:sp>
+        <p:nvSpPr>
+          <p:cNvPr id="4" name="TextBox 3"/>
+          <p:cNvSpPr txBox="1"/>
+          <p:nvPr/>
+        </p:nvSpPr>
+        <p:spPr>
+          <a:xfrm>
+            <a:off x="365760" y="164592"/>
+            <a:ext cx="8412480" cy="256032"/>
+          </a:xfrm>
+          <a:prstGeom prst="rect">
+            <a:avLst/>
+          </a:prstGeom>
+          <a:noFill/>
+        </p:spPr>
+        <p:txBody>
+          <a:bodyPr wrap="square">
+            <a:spAutoFit/>
+          </a:bodyPr>
+          <a:lstStyle/>
+          <a:p>
+            <a:pPr algn="l"/>
+            <a:r>
+              <a:rPr sz="1000" b="0">
+                <a:solidFill>
+                  <a:srgbClr val="B0893E"/>
+                </a:solidFill>
+                <a:latin typeface="Calibri"/>
+              </a:rPr>
+              <a:t>EVIDENCE ROOM — AP AGENT OS   ·   15:40</a:t>
+            </a:r>
+          </a:p>
+        </p:txBody>
+      </p:sp>
+      <p:sp>
+        <p:nvSpPr>
+          <p:cNvPr id="5" name="TextBox 4"/>
+          <p:cNvSpPr txBox="1"/>
+          <p:nvPr/>
+        </p:nvSpPr>
+        <p:spPr>
+          <a:xfrm>
+            <a:off x="365760" y="502920"/>
+            <a:ext cx="8412480" cy="731520"/>
+          </a:xfrm>
+          <a:prstGeom prst="rect">
+            <a:avLst/>
+          </a:prstGeom>
+          <a:noFill/>
+        </p:spPr>
+        <p:txBody>
+          <a:bodyPr wrap="square">
+            <a:spAutoFit/>
+          </a:bodyPr>
+          <a:lstStyle/>
+          <a:p>
+            <a:pPr algn="l"/>
+            <a:r>
+              <a:rPr sz="2600" b="0">
+                <a:solidFill>
+                  <a:srgbClr val="12160F"/>
+                </a:solidFill>
+                <a:latin typeface="Georgia"/>
+              </a:rPr>
+              <a:t>Exercise 5 — Steering and communications</a:t>
+            </a:r>
+          </a:p>
+        </p:txBody>
+      </p:sp>
+      <p:sp>
+        <p:nvSpPr>
+          <p:cNvPr id="6" name="TextBox 5"/>
+          <p:cNvSpPr txBox="1"/>
+          <p:nvPr/>
+        </p:nvSpPr>
+        <p:spPr>
+          <a:xfrm>
+            <a:off x="365760" y="1371600"/>
+            <a:ext cx="8321040" cy="4937760"/>
+          </a:xfrm>
+          <a:prstGeom prst="rect">
+            <a:avLst/>
+          </a:prstGeom>
+          <a:noFill/>
+        </p:spPr>
+        <p:txBody>
+          <a:bodyPr wrap="square">
+            <a:spAutoFit/>
+          </a:bodyPr>
+          <a:lstStyle/>
+          <a:p>
+            <a:pPr>
+              <a:spcAft>
+                <a:spcPts val="800"/>
+              </a:spcAft>
+            </a:pPr>
+            <a:r>
+              <a:rPr sz="1600">
+                <a:solidFill>
+                  <a:srgbClr val="12160F"/>
+                </a:solidFill>
+                <a:latin typeface="Calibri"/>
+              </a:rPr>
+              <a:t>·  Terms of reference skim. Monday note. Who tells operators. Who tells Audit.</a:t>
+            </a:r>
+          </a:p>
+          <a:p>
+            <a:pPr>
+              <a:spcAft>
+                <a:spcPts val="800"/>
+              </a:spcAft>
+            </a:pPr>
+            <a:r>
+              <a:rPr sz="1600">
+                <a:solidFill>
+                  <a:srgbClr val="12160F"/>
+                </a:solidFill>
+                <a:latin typeface="Calibri"/>
+              </a:rPr>
+              <a:t>·  Output: steering date; comms owners.</a:t>
+            </a:r>
+          </a:p>
+          <a:p>
+            <a:pPr>
+              <a:spcAft>
+                <a:spcPts val="800"/>
+              </a:spcAft>
+            </a:pPr>
+            <a:r>
+              <a:rPr sz="1600">
+                <a:solidFill>
+                  <a:srgbClr val="12160F"/>
+                </a:solidFill>
+                <a:latin typeface="Calibri"/>
+              </a:rPr>
+              <a:t>·  Close: read the wall. Parking lot assigned.</a:t>
+            </a:r>
+          </a:p>
+          <a:p>
+            <a:pPr>
+              <a:spcAft>
+                <a:spcPts val="800"/>
+              </a:spcAft>
+            </a:pPr>
+            <a:r>
+              <a:rPr sz="1600">
+                <a:solidFill>
+                  <a:srgbClr val="12160F"/>
+                </a:solidFill>
+                <a:latin typeface="Calibri"/>
+              </a:rPr>
+              <a:t>·  Facilitator: “We did not set a savings target. That was on purpose.”</a:t>
+            </a:r>
+          </a:p>
+        </p:txBody>
+      </p:sp>
+    </p:spTree>
+  </p:cSld>
+  <p:clrMapOvr>
+    <a:masterClrMapping/>
+  </p:clrMapOvr>
+</p:sld>
+</file>
+
+<file path=ppt/slides/slide11.xml><?xml version="1.0" encoding="utf-8"?>
+<p:sld xmlns:a="http://schemas.openxmlformats.org/drawingml/2006/main" xmlns:p="http://schemas.openxmlformats.org/presentationml/2006/main" xmlns:r="http://schemas.openxmlformats.org/officeDocument/2006/relationships">
+  <p:cSld>
+    <p:spTree>
+      <p:nvGrpSpPr>
+        <p:cNvPr id="1" name=""/>
+        <p:cNvGrpSpPr/>
+        <p:nvPr/>
+      </p:nvGrpSpPr>
+      <p:grpSpPr/>
+      <p:sp>
+        <p:nvSpPr>
+          <p:cNvPr id="2" name="Rectangle 1"/>
+          <p:cNvSpPr/>
+          <p:nvPr/>
+        </p:nvSpPr>
+        <p:spPr>
+          <a:xfrm>
+            <a:off x="0" y="0"/>
+            <a:ext cx="9144000" cy="6858000"/>
+          </a:xfrm>
+          <a:prstGeom prst="rect">
+            <a:avLst/>
+          </a:prstGeom>
+          <a:solidFill>
+            <a:srgbClr val="F3EEE4"/>
+          </a:solidFill>
+          <a:ln>
+            <a:noFill/>
+          </a:ln>
+        </p:spPr>
+        <p:style>
+          <a:lnRef idx="1">
+            <a:schemeClr val="accent1"/>
+          </a:lnRef>
+          <a:fillRef idx="3">
+            <a:schemeClr val="accent1"/>
+          </a:fillRef>
+          <a:effectRef idx="2">
+            <a:schemeClr val="accent1"/>
+          </a:effectRef>
+          <a:fontRef idx="minor">
+            <a:schemeClr val="lt1"/>
+          </a:fontRef>
+        </p:style>
+        <p:txBody>
+          <a:bodyPr rtlCol="0" anchor="ctr"/>
+          <a:lstStyle/>
+          <a:p>
+            <a:pPr algn="ctr"/>
+          </a:p>
+        </p:txBody>
+      </p:sp>
+      <p:sp>
+        <p:nvSpPr>
+          <p:cNvPr id="3" name="Rectangle 2"/>
+          <p:cNvSpPr/>
+          <p:nvPr/>
+        </p:nvSpPr>
+        <p:spPr>
+          <a:xfrm>
+            <a:off x="0" y="0"/>
+            <a:ext cx="73152" cy="6858000"/>
+          </a:xfrm>
+          <a:prstGeom prst="rect">
+            <a:avLst/>
+          </a:prstGeom>
+          <a:solidFill>
+            <a:srgbClr val="B0893E"/>
+          </a:solidFill>
+          <a:ln>
+            <a:noFill/>
+          </a:ln>
+        </p:spPr>
+        <p:style>
+          <a:lnRef idx="1">
+            <a:schemeClr val="accent1"/>
+          </a:lnRef>
+          <a:fillRef idx="3">
+            <a:schemeClr val="accent1"/>
+          </a:fillRef>
+          <a:effectRef idx="2">
+            <a:schemeClr val="accent1"/>
+          </a:effectRef>
+          <a:fontRef idx="minor">
+            <a:schemeClr val="lt1"/>
+          </a:fontRef>
+        </p:style>
+        <p:txBody>
+          <a:bodyPr rtlCol="0" anchor="ctr"/>
+          <a:lstStyle/>
+          <a:p>
+            <a:pPr algn="ctr"/>
+          </a:p>
+        </p:txBody>
+      </p:sp>
+      <p:sp>
+        <p:nvSpPr>
+          <p:cNvPr id="4" name="TextBox 3"/>
+          <p:cNvSpPr txBox="1"/>
+          <p:nvPr/>
+        </p:nvSpPr>
+        <p:spPr>
+          <a:xfrm>
+            <a:off x="365760" y="164592"/>
+            <a:ext cx="8412480" cy="256032"/>
+          </a:xfrm>
+          <a:prstGeom prst="rect">
+            <a:avLst/>
+          </a:prstGeom>
+          <a:noFill/>
+        </p:spPr>
+        <p:txBody>
+          <a:bodyPr wrap="square">
+            <a:spAutoFit/>
+          </a:bodyPr>
+          <a:lstStyle/>
+          <a:p>
+            <a:pPr algn="l"/>
+            <a:r>
+              <a:rPr sz="1000" b="0">
+                <a:solidFill>
+                  <a:srgbClr val="B0893E"/>
+                </a:solidFill>
+                <a:latin typeface="Calibri"/>
+              </a:rPr>
+              <a:t>EVIDENCE ROOM — AP AGENT OS   ·   Roles</a:t>
+            </a:r>
+          </a:p>
+        </p:txBody>
+      </p:sp>
+      <p:sp>
+        <p:nvSpPr>
+          <p:cNvPr id="5" name="TextBox 4"/>
+          <p:cNvSpPr txBox="1"/>
+          <p:nvPr/>
+        </p:nvSpPr>
+        <p:spPr>
+          <a:xfrm>
+            <a:off x="365760" y="502920"/>
+            <a:ext cx="8412480" cy="548640"/>
+          </a:xfrm>
+          <a:prstGeom prst="rect">
+            <a:avLst/>
+          </a:prstGeom>
+          <a:noFill/>
+        </p:spPr>
+        <p:txBody>
+          <a:bodyPr wrap="square">
+            <a:spAutoFit/>
+          </a:bodyPr>
+          <a:lstStyle/>
+          <a:p>
+            <a:pPr algn="l"/>
+            <a:r>
+              <a:rPr sz="2400" b="0">
+                <a:solidFill>
+                  <a:srgbClr val="12160F"/>
+                </a:solidFill>
+                <a:latin typeface="Georgia"/>
+              </a:rPr>
+              <a:t>Who must be in the room</a:t>
+            </a:r>
+          </a:p>
+        </p:txBody>
+      </p:sp>
+      <p:sp>
+        <p:nvSpPr>
+          <p:cNvPr id="6" name="Rectangle 5"/>
+          <p:cNvSpPr/>
+          <p:nvPr/>
+        </p:nvSpPr>
+        <p:spPr>
+          <a:xfrm>
+            <a:off x="365760" y="1234440"/>
+            <a:ext cx="4023360" cy="5029200"/>
+          </a:xfrm>
+          <a:prstGeom prst="rect">
+            <a:avLst/>
+          </a:prstGeom>
+          <a:solidFill>
+            <a:srgbClr val="FAF8F3"/>
+          </a:solidFill>
+          <a:ln>
+            <a:noFill/>
+          </a:ln>
+        </p:spPr>
+        <p:style>
+          <a:lnRef idx="1">
+            <a:schemeClr val="accent1"/>
+          </a:lnRef>
+          <a:fillRef idx="3">
+            <a:schemeClr val="accent1"/>
+          </a:fillRef>
+          <a:effectRef idx="2">
+            <a:schemeClr val="accent1"/>
+          </a:effectRef>
+          <a:fontRef idx="minor">
+            <a:schemeClr val="lt1"/>
+          </a:fontRef>
+        </p:style>
+        <p:txBody>
+          <a:bodyPr rtlCol="0" anchor="ctr"/>
+          <a:lstStyle/>
+          <a:p>
+            <a:pPr algn="ctr"/>
+          </a:p>
+        </p:txBody>
+      </p:sp>
+      <p:sp>
+        <p:nvSpPr>
+          <p:cNvPr id="7" name="Rectangle 6"/>
+          <p:cNvSpPr/>
+          <p:nvPr/>
+        </p:nvSpPr>
+        <p:spPr>
+          <a:xfrm>
+            <a:off x="4754880" y="1234440"/>
+            <a:ext cx="4023360" cy="5029200"/>
+          </a:xfrm>
+          <a:prstGeom prst="rect">
+            <a:avLst/>
+          </a:prstGeom>
+          <a:solidFill>
+            <a:srgbClr val="FAF8F3"/>
+          </a:solidFill>
+          <a:ln>
+            <a:noFill/>
+          </a:ln>
+        </p:spPr>
+        <p:style>
+          <a:lnRef idx="1">
+            <a:schemeClr val="accent1"/>
+          </a:lnRef>
+          <a:fillRef idx="3">
+            <a:schemeClr val="accent1"/>
+          </a:fillRef>
+          <a:effectRef idx="2">
+            <a:schemeClr val="accent1"/>
+          </a:effectRef>
+          <a:fontRef idx="minor">
+            <a:schemeClr val="lt1"/>
+          </a:fontRef>
+        </p:style>
+        <p:txBody>
+          <a:bodyPr rtlCol="0" anchor="ctr"/>
+          <a:lstStyle/>
+          <a:p>
+            <a:pPr algn="ctr"/>
+          </a:p>
+        </p:txBody>
+      </p:sp>
+      <p:sp>
+        <p:nvSpPr>
+          <p:cNvPr id="8" name="TextBox 7"/>
+          <p:cNvSpPr txBox="1"/>
+          <p:nvPr/>
+        </p:nvSpPr>
+        <p:spPr>
+          <a:xfrm>
+            <a:off x="502920" y="1371600"/>
+            <a:ext cx="3749039" cy="365760"/>
+          </a:xfrm>
+          <a:prstGeom prst="rect">
+            <a:avLst/>
+          </a:prstGeom>
+          <a:noFill/>
+        </p:spPr>
+        <p:txBody>
+          <a:bodyPr wrap="square">
+            <a:spAutoFit/>
+          </a:bodyPr>
+          <a:lstStyle/>
+          <a:p>
+            <a:pPr algn="l"/>
+            <a:r>
+              <a:rPr sz="1400" b="1">
+                <a:solidFill>
+                  <a:srgbClr val="B0893E"/>
+                </a:solidFill>
+                <a:latin typeface="Calibri"/>
+              </a:rPr>
+              <a:t>Required</a:t>
+            </a:r>
+          </a:p>
+        </p:txBody>
+      </p:sp>
+      <p:sp>
+        <p:nvSpPr>
+          <p:cNvPr id="9" name="TextBox 8"/>
+          <p:cNvSpPr txBox="1"/>
+          <p:nvPr/>
+        </p:nvSpPr>
+        <p:spPr>
+          <a:xfrm>
+            <a:off x="502920" y="1828800"/>
+            <a:ext cx="3749039" cy="4206240"/>
+          </a:xfrm>
+          <a:prstGeom prst="rect">
+            <a:avLst/>
+          </a:prstGeom>
+          <a:noFill/>
+        </p:spPr>
+        <p:txBody>
+          <a:bodyPr wrap="square">
+            <a:spAutoFit/>
+          </a:bodyPr>
+          <a:lstStyle/>
+          <a:p>
+            <a:pPr>
+              <a:spcAft>
+                <a:spcPts val="800"/>
+              </a:spcAft>
+            </a:pPr>
+            <a:r>
+              <a:rPr sz="1400">
+                <a:solidFill>
+                  <a:srgbClr val="12160F"/>
+                </a:solidFill>
+                <a:latin typeface="Calibri"/>
+              </a:rPr>
+              <a:t>·  Process owner / AP manager</a:t>
+            </a:r>
+          </a:p>
+          <a:p>
+            <a:pPr>
+              <a:spcAft>
+                <a:spcPts val="800"/>
+              </a:spcAft>
+            </a:pPr>
+            <a:r>
+              <a:rPr sz="1400">
+                <a:solidFill>
+                  <a:srgbClr val="12160F"/>
+                </a:solidFill>
+                <a:latin typeface="Calibri"/>
+              </a:rPr>
+              <a:t>·  Controls or Internal Audit challenger</a:t>
+            </a:r>
+          </a:p>
+          <a:p>
+            <a:pPr>
+              <a:spcAft>
+                <a:spcPts val="800"/>
+              </a:spcAft>
+            </a:pPr>
+            <a:r>
+              <a:rPr sz="1400">
+                <a:solidFill>
+                  <a:srgbClr val="12160F"/>
+                </a:solidFill>
+                <a:latin typeface="Calibri"/>
+              </a:rPr>
+              <a:t>·  Match / exception desk</a:t>
+            </a:r>
+          </a:p>
+          <a:p>
+            <a:pPr>
+              <a:spcAft>
+                <a:spcPts val="800"/>
+              </a:spcAft>
+            </a:pPr>
+            <a:r>
+              <a:rPr sz="1400">
+                <a:solidFill>
+                  <a:srgbClr val="12160F"/>
+                </a:solidFill>
+                <a:latin typeface="Calibri"/>
+              </a:rPr>
+              <a:t>·  Transformation facilitator</a:t>
+            </a:r>
+          </a:p>
+        </p:txBody>
+      </p:sp>
+      <p:sp>
+        <p:nvSpPr>
+          <p:cNvPr id="10" name="TextBox 9"/>
+          <p:cNvSpPr txBox="1"/>
+          <p:nvPr/>
+        </p:nvSpPr>
+        <p:spPr>
+          <a:xfrm>
+            <a:off x="4892040" y="1371600"/>
+            <a:ext cx="3749039" cy="365760"/>
+          </a:xfrm>
+          <a:prstGeom prst="rect">
+            <a:avLst/>
+          </a:prstGeom>
+          <a:noFill/>
+        </p:spPr>
+        <p:txBody>
+          <a:bodyPr wrap="square">
+            <a:spAutoFit/>
+          </a:bodyPr>
+          <a:lstStyle/>
+          <a:p>
+            <a:pPr algn="l"/>
+            <a:r>
+              <a:rPr sz="1400" b="1">
+                <a:solidFill>
+                  <a:srgbClr val="B0893E"/>
+                </a:solidFill>
+                <a:latin typeface="Calibri"/>
+              </a:rPr>
+              <a:t>Join at holds</a:t>
+            </a:r>
+          </a:p>
+        </p:txBody>
+      </p:sp>
+      <p:sp>
+        <p:nvSpPr>
+          <p:cNvPr id="11" name="TextBox 10"/>
+          <p:cNvSpPr txBox="1"/>
+          <p:nvPr/>
+        </p:nvSpPr>
+        <p:spPr>
+          <a:xfrm>
+            <a:off x="4892040" y="1828800"/>
+            <a:ext cx="3749039" cy="4206240"/>
+          </a:xfrm>
+          <a:prstGeom prst="rect">
+            <a:avLst/>
+          </a:prstGeom>
+          <a:noFill/>
+        </p:spPr>
+        <p:txBody>
+          <a:bodyPr wrap="square">
+            <a:spAutoFit/>
+          </a:bodyPr>
+          <a:lstStyle/>
+          <a:p>
+            <a:pPr>
+              <a:spcAft>
+                <a:spcPts val="800"/>
+              </a:spcAft>
+            </a:pPr>
+            <a:r>
+              <a:rPr sz="1400">
+                <a:solidFill>
+                  <a:srgbClr val="12160F"/>
+                </a:solidFill>
+                <a:latin typeface="Calibri"/>
+              </a:rPr>
+              <a:t>·  Controller or CAO</a:t>
+            </a:r>
+          </a:p>
+          <a:p>
+            <a:pPr>
+              <a:spcAft>
+                <a:spcPts val="800"/>
+              </a:spcAft>
+            </a:pPr>
+            <a:r>
+              <a:rPr sz="1400">
+                <a:solidFill>
+                  <a:srgbClr val="12160F"/>
+                </a:solidFill>
+                <a:latin typeface="Calibri"/>
+              </a:rPr>
+              <a:t>·  Treasury / payments lead</a:t>
+            </a:r>
+          </a:p>
+          <a:p>
+            <a:pPr>
+              <a:spcAft>
+                <a:spcPts val="800"/>
+              </a:spcAft>
+            </a:pPr>
+            <a:r>
+              <a:rPr sz="1400">
+                <a:solidFill>
+                  <a:srgbClr val="12160F"/>
+                </a:solidFill>
+                <a:latin typeface="Calibri"/>
+              </a:rPr>
+              <a:t>·  ERP / systems owner (afternoon if needed)</a:t>
+            </a:r>
+          </a:p>
+          <a:p>
+            <a:pPr>
+              <a:spcAft>
+                <a:spcPts val="800"/>
+              </a:spcAft>
+            </a:pPr>
+            <a:r>
+              <a:rPr sz="1400">
+                <a:solidFill>
+                  <a:srgbClr val="12160F"/>
+                </a:solidFill>
+                <a:latin typeface="Calibri"/>
+              </a:rPr>
+              <a:t>·  Procurement if PO Quality is in Wave 1 — it is not</a:t>
+            </a:r>
+          </a:p>
+        </p:txBody>
+      </p:sp>
+    </p:spTree>
+  </p:cSld>
+  <p:clrMapOvr>
+    <a:masterClrMapping/>
+  </p:clrMapOvr>
+</p:sld>
+</file>
+
+<file path=ppt/slides/slide12.xml><?xml version="1.0" encoding="utf-8"?>
+<p:sld xmlns:a="http://schemas.openxmlformats.org/drawingml/2006/main" xmlns:p="http://schemas.openxmlformats.org/presentationml/2006/main" xmlns:r="http://schemas.openxmlformats.org/officeDocument/2006/relationships">
+  <p:cSld>
+    <p:spTree>
+      <p:nvGrpSpPr>
+        <p:cNvPr id="1" name=""/>
+        <p:cNvGrpSpPr/>
+        <p:nvPr/>
+      </p:nvGrpSpPr>
+      <p:grpSpPr/>
+      <p:sp>
+        <p:nvSpPr>
+          <p:cNvPr id="2" name="Rectangle 1"/>
+          <p:cNvSpPr/>
+          <p:nvPr/>
+        </p:nvSpPr>
+        <p:spPr>
+          <a:xfrm>
+            <a:off x="0" y="0"/>
+            <a:ext cx="9144000" cy="6858000"/>
+          </a:xfrm>
+          <a:prstGeom prst="rect">
+            <a:avLst/>
+          </a:prstGeom>
+          <a:solidFill>
+            <a:srgbClr val="F3EEE4"/>
+          </a:solidFill>
+          <a:ln>
+            <a:noFill/>
+          </a:ln>
+        </p:spPr>
+        <p:style>
+          <a:lnRef idx="1">
+            <a:schemeClr val="accent1"/>
+          </a:lnRef>
+          <a:fillRef idx="3">
+            <a:schemeClr val="accent1"/>
+          </a:fillRef>
+          <a:effectRef idx="2">
+            <a:schemeClr val="accent1"/>
+          </a:effectRef>
+          <a:fontRef idx="minor">
+            <a:schemeClr val="lt1"/>
+          </a:fontRef>
+        </p:style>
+        <p:txBody>
+          <a:bodyPr rtlCol="0" anchor="ctr"/>
+          <a:lstStyle/>
+          <a:p>
+            <a:pPr algn="ctr"/>
+          </a:p>
+        </p:txBody>
+      </p:sp>
+      <p:sp>
+        <p:nvSpPr>
+          <p:cNvPr id="3" name="Rectangle 2"/>
+          <p:cNvSpPr/>
+          <p:nvPr/>
+        </p:nvSpPr>
+        <p:spPr>
+          <a:xfrm>
+            <a:off x="0" y="0"/>
+            <a:ext cx="73152" cy="6858000"/>
+          </a:xfrm>
+          <a:prstGeom prst="rect">
+            <a:avLst/>
+          </a:prstGeom>
+          <a:solidFill>
+            <a:srgbClr val="B0893E"/>
+          </a:solidFill>
+          <a:ln>
+            <a:noFill/>
+          </a:ln>
+        </p:spPr>
+        <p:style>
+          <a:lnRef idx="1">
+            <a:schemeClr val="accent1"/>
+          </a:lnRef>
+          <a:fillRef idx="3">
+            <a:schemeClr val="accent1"/>
+          </a:fillRef>
+          <a:effectRef idx="2">
+            <a:schemeClr val="accent1"/>
+          </a:effectRef>
+          <a:fontRef idx="minor">
+            <a:schemeClr val="lt1"/>
+          </a:fontRef>
+        </p:style>
+        <p:txBody>
+          <a:bodyPr rtlCol="0" anchor="ctr"/>
+          <a:lstStyle/>
+          <a:p>
+            <a:pPr algn="ctr"/>
+          </a:p>
+        </p:txBody>
+      </p:sp>
+      <p:sp>
+        <p:nvSpPr>
+          <p:cNvPr id="4" name="TextBox 3"/>
+          <p:cNvSpPr txBox="1"/>
+          <p:nvPr/>
+        </p:nvSpPr>
+        <p:spPr>
+          <a:xfrm>
+            <a:off x="365760" y="164592"/>
+            <a:ext cx="8412480" cy="256032"/>
+          </a:xfrm>
+          <a:prstGeom prst="rect">
+            <a:avLst/>
+          </a:prstGeom>
+          <a:noFill/>
+        </p:spPr>
+        <p:txBody>
+          <a:bodyPr wrap="square">
+            <a:spAutoFit/>
+          </a:bodyPr>
+          <a:lstStyle/>
+          <a:p>
+            <a:pPr algn="l"/>
+            <a:r>
+              <a:rPr sz="1000" b="0">
+                <a:solidFill>
+                  <a:srgbClr val="B0893E"/>
+                </a:solidFill>
+                <a:latin typeface="Calibri"/>
+              </a:rPr>
+              <a:t>EVIDENCE ROOM — AP AGENT OS   ·   Homework</a:t>
+            </a:r>
+          </a:p>
+        </p:txBody>
+      </p:sp>
+      <p:sp>
+        <p:nvSpPr>
+          <p:cNvPr id="5" name="TextBox 4"/>
+          <p:cNvSpPr txBox="1"/>
+          <p:nvPr/>
+        </p:nvSpPr>
+        <p:spPr>
+          <a:xfrm>
+            <a:off x="365760" y="502920"/>
+            <a:ext cx="8412480" cy="731520"/>
+          </a:xfrm>
+          <a:prstGeom prst="rect">
+            <a:avLst/>
+          </a:prstGeom>
+          <a:noFill/>
+        </p:spPr>
+        <p:txBody>
+          <a:bodyPr wrap="square">
+            <a:spAutoFit/>
+          </a:bodyPr>
+          <a:lstStyle/>
+          <a:p>
+            <a:pPr algn="l"/>
+            <a:r>
+              <a:rPr sz="2600" b="0">
+                <a:solidFill>
+                  <a:srgbClr val="12160F"/>
+                </a:solidFill>
+                <a:latin typeface="Georgia"/>
+              </a:rPr>
+              <a:t>48 hours after the room</a:t>
+            </a:r>
+          </a:p>
+        </p:txBody>
+      </p:sp>
+      <p:sp>
+        <p:nvSpPr>
+          <p:cNvPr id="6" name="TextBox 5"/>
+          <p:cNvSpPr txBox="1"/>
+          <p:nvPr/>
+        </p:nvSpPr>
+        <p:spPr>
+          <a:xfrm>
+            <a:off x="365760" y="1371600"/>
+            <a:ext cx="8321040" cy="4937760"/>
+          </a:xfrm>
+          <a:prstGeom prst="rect">
+            <a:avLst/>
+          </a:prstGeom>
+          <a:noFill/>
+        </p:spPr>
+        <p:txBody>
+          <a:bodyPr wrap="square">
+            <a:spAutoFit/>
+          </a:bodyPr>
+          <a:lstStyle/>
+          <a:p>
+            <a:pPr>
+              <a:spcAft>
+                <a:spcPts val="800"/>
+              </a:spcAft>
+            </a:pPr>
+            <a:r>
+              <a:rPr sz="1600">
+                <a:solidFill>
+                  <a:srgbClr val="12160F"/>
+                </a:solidFill>
+                <a:latin typeface="Calibri"/>
+              </a:rPr>
+              <a:t>·  Owners confirm they accept the job description.</a:t>
+            </a:r>
+          </a:p>
+          <a:p>
+            <a:pPr>
+              <a:spcAft>
+                <a:spcPts val="800"/>
+              </a:spcAft>
+            </a:pPr>
+            <a:r>
+              <a:rPr sz="1600">
+                <a:solidFill>
+                  <a:srgbClr val="12160F"/>
+                </a:solidFill>
+                <a:latin typeface="Calibri"/>
+              </a:rPr>
+              <a:t>·  IAM starts the service-account request.</a:t>
+            </a:r>
+          </a:p>
+          <a:p>
+            <a:pPr>
+              <a:spcAft>
+                <a:spcPts val="800"/>
+              </a:spcAft>
+            </a:pPr>
+            <a:r>
+              <a:rPr sz="1600">
+                <a:solidFill>
+                  <a:srgbClr val="12160F"/>
+                </a:solidFill>
+                <a:latin typeface="Calibri"/>
+              </a:rPr>
+              <a:t>·  Informal helpers listed on the autonomy register.</a:t>
+            </a:r>
+          </a:p>
+          <a:p>
+            <a:pPr>
+              <a:spcAft>
+                <a:spcPts val="800"/>
+              </a:spcAft>
+            </a:pPr>
+            <a:r>
+              <a:rPr sz="1600">
+                <a:solidFill>
+                  <a:srgbClr val="12160F"/>
+                </a:solidFill>
+                <a:latin typeface="Calibri"/>
+              </a:rPr>
+              <a:t>·  Implementation tracker loaded.</a:t>
+            </a:r>
+          </a:p>
+          <a:p>
+            <a:pPr>
+              <a:spcAft>
+                <a:spcPts val="800"/>
+              </a:spcAft>
+            </a:pPr>
+            <a:r>
+              <a:rPr sz="1600">
+                <a:solidFill>
+                  <a:srgbClr val="12160F"/>
+                </a:solidFill>
+                <a:latin typeface="Calibri"/>
+              </a:rPr>
+              <a:t>·  No live invoice pasting into chats or copilots.</a:t>
+            </a:r>
+          </a:p>
+        </p:txBody>
+      </p:sp>
+    </p:spTree>
+  </p:cSld>
+  <p:clrMapOvr>
+    <a:masterClrMapping/>
+  </p:clrMapOvr>
+</p:sld>
+</file>
+
+<file path=ppt/slides/slide13.xml><?xml version="1.0" encoding="utf-8"?>
+<p:sld xmlns:a="http://schemas.openxmlformats.org/drawingml/2006/main" xmlns:p="http://schemas.openxmlformats.org/presentationml/2006/main" xmlns:r="http://schemas.openxmlformats.org/officeDocument/2006/relationships">
+  <p:cSld>
+    <p:spTree>
+      <p:nvGrpSpPr>
+        <p:cNvPr id="1" name=""/>
+        <p:cNvGrpSpPr/>
+        <p:nvPr/>
+      </p:nvGrpSpPr>
+      <p:grpSpPr/>
+      <p:sp>
+        <p:nvSpPr>
+          <p:cNvPr id="2" name="Rectangle 1"/>
+          <p:cNvSpPr/>
+          <p:nvPr/>
+        </p:nvSpPr>
+        <p:spPr>
+          <a:xfrm>
+            <a:off x="0" y="0"/>
+            <a:ext cx="9144000" cy="6858000"/>
+          </a:xfrm>
+          <a:prstGeom prst="rect">
+            <a:avLst/>
+          </a:prstGeom>
+          <a:solidFill>
+            <a:srgbClr val="F3EEE4"/>
+          </a:solidFill>
+          <a:ln>
+            <a:noFill/>
+          </a:ln>
+        </p:spPr>
+        <p:style>
+          <a:lnRef idx="1">
+            <a:schemeClr val="accent1"/>
+          </a:lnRef>
+          <a:fillRef idx="3">
+            <a:schemeClr val="accent1"/>
+          </a:fillRef>
+          <a:effectRef idx="2">
+            <a:schemeClr val="accent1"/>
+          </a:effectRef>
+          <a:fontRef idx="minor">
+            <a:schemeClr val="lt1"/>
+          </a:fontRef>
+        </p:style>
+        <p:txBody>
+          <a:bodyPr rtlCol="0" anchor="ctr"/>
+          <a:lstStyle/>
+          <a:p>
+            <a:pPr algn="ctr"/>
+          </a:p>
+        </p:txBody>
+      </p:sp>
+      <p:sp>
+        <p:nvSpPr>
+          <p:cNvPr id="3" name="Rectangle 2"/>
+          <p:cNvSpPr/>
+          <p:nvPr/>
+        </p:nvSpPr>
+        <p:spPr>
+          <a:xfrm>
+            <a:off x="0" y="0"/>
+            <a:ext cx="73152" cy="6858000"/>
+          </a:xfrm>
+          <a:prstGeom prst="rect">
+            <a:avLst/>
+          </a:prstGeom>
+          <a:solidFill>
+            <a:srgbClr val="B0893E"/>
+          </a:solidFill>
+          <a:ln>
+            <a:noFill/>
+          </a:ln>
+        </p:spPr>
+        <p:style>
+          <a:lnRef idx="1">
+            <a:schemeClr val="accent1"/>
+          </a:lnRef>
+          <a:fillRef idx="3">
+            <a:schemeClr val="accent1"/>
+          </a:fillRef>
+          <a:effectRef idx="2">
+            <a:schemeClr val="accent1"/>
+          </a:effectRef>
+          <a:fontRef idx="minor">
+            <a:schemeClr val="lt1"/>
+          </a:fontRef>
+        </p:style>
+        <p:txBody>
+          <a:bodyPr rtlCol="0" anchor="ctr"/>
+          <a:lstStyle/>
+          <a:p>
+            <a:pPr algn="ctr"/>
+          </a:p>
+        </p:txBody>
+      </p:sp>
+      <p:sp>
+        <p:nvSpPr>
+          <p:cNvPr id="4" name="TextBox 3"/>
+          <p:cNvSpPr txBox="1"/>
+          <p:nvPr/>
+        </p:nvSpPr>
+        <p:spPr>
+          <a:xfrm>
+            <a:off x="365760" y="164592"/>
+            <a:ext cx="8412480" cy="256032"/>
+          </a:xfrm>
+          <a:prstGeom prst="rect">
+            <a:avLst/>
+          </a:prstGeom>
+          <a:noFill/>
+        </p:spPr>
+        <p:txBody>
+          <a:bodyPr wrap="square">
+            <a:spAutoFit/>
+          </a:bodyPr>
+          <a:lstStyle/>
+          <a:p>
+            <a:pPr algn="l"/>
+            <a:r>
+              <a:rPr sz="1000" b="0">
+                <a:solidFill>
+                  <a:srgbClr val="B0893E"/>
+                </a:solidFill>
+                <a:latin typeface="Calibri"/>
+              </a:rPr>
+              <a:t>EVIDENCE ROOM — AP AGENT OS   ·   Virtual</a:t>
+            </a:r>
+          </a:p>
+        </p:txBody>
+      </p:sp>
+      <p:sp>
+        <p:nvSpPr>
+          <p:cNvPr id="5" name="TextBox 4"/>
+          <p:cNvSpPr txBox="1"/>
+          <p:nvPr/>
+        </p:nvSpPr>
+        <p:spPr>
+          <a:xfrm>
+            <a:off x="365760" y="502920"/>
+            <a:ext cx="8412480" cy="731520"/>
+          </a:xfrm>
+          <a:prstGeom prst="rect">
+            <a:avLst/>
+          </a:prstGeom>
+          <a:noFill/>
+        </p:spPr>
+        <p:txBody>
+          <a:bodyPr wrap="square">
+            <a:spAutoFit/>
+          </a:bodyPr>
+          <a:lstStyle/>
+          <a:p>
+            <a:pPr algn="l"/>
+            <a:r>
+              <a:rPr sz="2600" b="0">
+                <a:solidFill>
+                  <a:srgbClr val="12160F"/>
+                </a:solidFill>
+                <a:latin typeface="Georgia"/>
+              </a:rPr>
+              <a:t>Same blocks if remote</a:t>
+            </a:r>
+          </a:p>
+        </p:txBody>
+      </p:sp>
+      <p:sp>
+        <p:nvSpPr>
+          <p:cNvPr id="6" name="TextBox 5"/>
+          <p:cNvSpPr txBox="1"/>
+          <p:nvPr/>
+        </p:nvSpPr>
+        <p:spPr>
+          <a:xfrm>
+            <a:off x="365760" y="1371600"/>
+            <a:ext cx="8321040" cy="4937760"/>
+          </a:xfrm>
+          <a:prstGeom prst="rect">
+            <a:avLst/>
+          </a:prstGeom>
+          <a:noFill/>
+        </p:spPr>
+        <p:txBody>
+          <a:bodyPr wrap="square">
+            <a:spAutoFit/>
+          </a:bodyPr>
+          <a:lstStyle/>
+          <a:p>
+            <a:pPr>
+              <a:spcAft>
+                <a:spcPts val="800"/>
+              </a:spcAft>
+            </a:pPr>
+            <a:r>
+              <a:rPr sz="1600">
+                <a:solidFill>
+                  <a:srgbClr val="12160F"/>
+                </a:solidFill>
+                <a:latin typeface="Calibri"/>
+              </a:rPr>
+              <a:t>·  Exercises 2 and 3 in breakouts of 25 minutes + 10-minute plenary.</a:t>
+            </a:r>
+          </a:p>
+          <a:p>
+            <a:pPr>
+              <a:spcAft>
+                <a:spcPts val="800"/>
+              </a:spcAft>
+            </a:pPr>
+            <a:r>
+              <a:rPr sz="1600">
+                <a:solidFill>
+                  <a:srgbClr val="12160F"/>
+                </a:solidFill>
+                <a:latin typeface="Calibri"/>
+              </a:rPr>
+              <a:t>·  Send packs the night before.</a:t>
+            </a:r>
+          </a:p>
+          <a:p>
+            <a:pPr>
+              <a:spcAft>
+                <a:spcPts val="800"/>
+              </a:spcAft>
+            </a:pPr>
+            <a:r>
+              <a:rPr sz="1600">
+                <a:solidFill>
+                  <a:srgbClr val="12160F"/>
+                </a:solidFill>
+                <a:latin typeface="Calibri"/>
+              </a:rPr>
+              <a:t>·  Prohibit live invoice pasting into chats.</a:t>
+            </a:r>
+          </a:p>
+          <a:p>
+            <a:pPr>
+              <a:spcAft>
+                <a:spcPts val="800"/>
+              </a:spcAft>
+            </a:pPr>
+            <a:r>
+              <a:rPr sz="1600">
+                <a:solidFill>
+                  <a:srgbClr val="12160F"/>
+                </a:solidFill>
+                <a:latin typeface="Calibri"/>
+              </a:rPr>
+              <a:t>·  Treasury still repeats the payment sentence out loud.</a:t>
             </a:r>
           </a:p>
         </p:txBody>
@@ -3157,61 +4692,259 @@
       <p:grpSpPr/>
       <p:sp>
         <p:nvSpPr>
-          <p:cNvPr id="2" name="Title 1"/>
-          <p:cNvSpPr>
-            <a:spLocks noGrp="1"/>
-          </p:cNvSpPr>
-          <p:nvPr>
-            <p:ph type="title"/>
-          </p:nvPr>
-        </p:nvSpPr>
-        <p:spPr/>
-        <p:txBody>
-          <a:bodyPr/>
-          <a:lstStyle/>
-          <a:p>
-            <a:r>
-              <a:t>Morning</a:t>
-            </a:r>
-          </a:p>
-        </p:txBody>
-      </p:sp>
-      <p:sp>
-        <p:nvSpPr>
-          <p:cNvPr id="3" name="Content Placeholder 2"/>
-          <p:cNvSpPr>
-            <a:spLocks noGrp="1"/>
-          </p:cNvSpPr>
-          <p:nvPr>
-            <p:ph idx="1"/>
-          </p:nvPr>
-        </p:nvSpPr>
-        <p:spPr/>
-        <p:txBody>
-          <a:bodyPr/>
-          <a:lstStyle/>
-          <a:p>
-            <a:pPr/>
-            <a:r>
-              <a:t>09:00 Diagnostic challenge — show the artefact.</a:t>
-            </a:r>
-          </a:p>
-          <a:p>
-            <a:pPr/>
-            <a:r>
-              <a:t>10:15 Map the path (PO-goods first).</a:t>
-            </a:r>
-          </a:p>
-          <a:p>
-            <a:pPr/>
-            <a:r>
-              <a:t>11:15 Exception codes — closed list.</a:t>
-            </a:r>
-          </a:p>
-          <a:p>
-            <a:pPr/>
-            <a:r>
-              <a:t>12:00 Payment sentence on the wall.</a:t>
+          <p:cNvPr id="2" name="Rectangle 1"/>
+          <p:cNvSpPr/>
+          <p:nvPr/>
+        </p:nvSpPr>
+        <p:spPr>
+          <a:xfrm>
+            <a:off x="0" y="0"/>
+            <a:ext cx="9144000" cy="6858000"/>
+          </a:xfrm>
+          <a:prstGeom prst="rect">
+            <a:avLst/>
+          </a:prstGeom>
+          <a:solidFill>
+            <a:srgbClr val="F3EEE4"/>
+          </a:solidFill>
+          <a:ln>
+            <a:noFill/>
+          </a:ln>
+        </p:spPr>
+        <p:style>
+          <a:lnRef idx="1">
+            <a:schemeClr val="accent1"/>
+          </a:lnRef>
+          <a:fillRef idx="3">
+            <a:schemeClr val="accent1"/>
+          </a:fillRef>
+          <a:effectRef idx="2">
+            <a:schemeClr val="accent1"/>
+          </a:effectRef>
+          <a:fontRef idx="minor">
+            <a:schemeClr val="lt1"/>
+          </a:fontRef>
+        </p:style>
+        <p:txBody>
+          <a:bodyPr rtlCol="0" anchor="ctr"/>
+          <a:lstStyle/>
+          <a:p>
+            <a:pPr algn="ctr"/>
+          </a:p>
+        </p:txBody>
+      </p:sp>
+      <p:sp>
+        <p:nvSpPr>
+          <p:cNvPr id="3" name="Rectangle 2"/>
+          <p:cNvSpPr/>
+          <p:nvPr/>
+        </p:nvSpPr>
+        <p:spPr>
+          <a:xfrm>
+            <a:off x="0" y="0"/>
+            <a:ext cx="73152" cy="6858000"/>
+          </a:xfrm>
+          <a:prstGeom prst="rect">
+            <a:avLst/>
+          </a:prstGeom>
+          <a:solidFill>
+            <a:srgbClr val="B0893E"/>
+          </a:solidFill>
+          <a:ln>
+            <a:noFill/>
+          </a:ln>
+        </p:spPr>
+        <p:style>
+          <a:lnRef idx="1">
+            <a:schemeClr val="accent1"/>
+          </a:lnRef>
+          <a:fillRef idx="3">
+            <a:schemeClr val="accent1"/>
+          </a:fillRef>
+          <a:effectRef idx="2">
+            <a:schemeClr val="accent1"/>
+          </a:effectRef>
+          <a:fontRef idx="minor">
+            <a:schemeClr val="lt1"/>
+          </a:fontRef>
+        </p:style>
+        <p:txBody>
+          <a:bodyPr rtlCol="0" anchor="ctr"/>
+          <a:lstStyle/>
+          <a:p>
+            <a:pPr algn="ctr"/>
+          </a:p>
+        </p:txBody>
+      </p:sp>
+      <p:sp>
+        <p:nvSpPr>
+          <p:cNvPr id="4" name="TextBox 3"/>
+          <p:cNvSpPr txBox="1"/>
+          <p:nvPr/>
+        </p:nvSpPr>
+        <p:spPr>
+          <a:xfrm>
+            <a:off x="365760" y="164592"/>
+            <a:ext cx="8412480" cy="256032"/>
+          </a:xfrm>
+          <a:prstGeom prst="rect">
+            <a:avLst/>
+          </a:prstGeom>
+          <a:noFill/>
+        </p:spPr>
+        <p:txBody>
+          <a:bodyPr wrap="square">
+            <a:spAutoFit/>
+          </a:bodyPr>
+          <a:lstStyle/>
+          <a:p>
+            <a:pPr algn="l"/>
+            <a:r>
+              <a:rPr sz="1000" b="0">
+                <a:solidFill>
+                  <a:srgbClr val="B0893E"/>
+                </a:solidFill>
+                <a:latin typeface="Calibri"/>
+              </a:rPr>
+              <a:t>EVIDENCE ROOM — AP AGENT OS   ·   Contract</a:t>
+            </a:r>
+          </a:p>
+        </p:txBody>
+      </p:sp>
+      <p:sp>
+        <p:nvSpPr>
+          <p:cNvPr id="5" name="TextBox 4"/>
+          <p:cNvSpPr txBox="1"/>
+          <p:nvPr/>
+        </p:nvSpPr>
+        <p:spPr>
+          <a:xfrm>
+            <a:off x="365760" y="502920"/>
+            <a:ext cx="8412480" cy="731520"/>
+          </a:xfrm>
+          <a:prstGeom prst="rect">
+            <a:avLst/>
+          </a:prstGeom>
+          <a:noFill/>
+        </p:spPr>
+        <p:txBody>
+          <a:bodyPr wrap="square">
+            <a:spAutoFit/>
+          </a:bodyPr>
+          <a:lstStyle/>
+          <a:p>
+            <a:pPr algn="l"/>
+            <a:r>
+              <a:rPr sz="2600" b="0">
+                <a:solidFill>
+                  <a:srgbClr val="12160F"/>
+                </a:solidFill>
+                <a:latin typeface="Georgia"/>
+              </a:rPr>
+              <a:t>What this day is</a:t>
+            </a:r>
+          </a:p>
+        </p:txBody>
+      </p:sp>
+      <p:sp>
+        <p:nvSpPr>
+          <p:cNvPr id="6" name="TextBox 5"/>
+          <p:cNvSpPr txBox="1"/>
+          <p:nvPr/>
+        </p:nvSpPr>
+        <p:spPr>
+          <a:xfrm>
+            <a:off x="365760" y="1371600"/>
+            <a:ext cx="8321040" cy="4937760"/>
+          </a:xfrm>
+          <a:prstGeom prst="rect">
+            <a:avLst/>
+          </a:prstGeom>
+          <a:noFill/>
+        </p:spPr>
+        <p:txBody>
+          <a:bodyPr wrap="square">
+            <a:spAutoFit/>
+          </a:bodyPr>
+          <a:lstStyle/>
+          <a:p>
+            <a:pPr>
+              <a:spcAft>
+                <a:spcPts val="800"/>
+              </a:spcAft>
+            </a:pPr>
+            <a:r>
+              <a:rPr sz="1600">
+                <a:solidFill>
+                  <a:srgbClr val="12160F"/>
+                </a:solidFill>
+                <a:latin typeface="Calibri"/>
+              </a:rPr>
+              <a:t>·  Design the agent layer. Keep the stack.</a:t>
+            </a:r>
+          </a:p>
+          <a:p>
+            <a:pPr>
+              <a:spcAft>
+                <a:spcPts val="800"/>
+              </a:spcAft>
+            </a:pPr>
+            <a:r>
+              <a:rPr sz="1600">
+                <a:solidFill>
+                  <a:srgbClr val="12160F"/>
+                </a:solidFill>
+                <a:latin typeface="Calibri"/>
+              </a:rPr>
+              <a:t>·  Outcome: maturity sentence, hold status, Wave 1 charters, two-week shadow plan, steering date.</a:t>
+            </a:r>
+          </a:p>
+          <a:p>
+            <a:pPr>
+              <a:spcAft>
+                <a:spcPts val="800"/>
+              </a:spcAft>
+            </a:pPr>
+            <a:r>
+              <a:rPr sz="1600">
+                <a:solidFill>
+                  <a:srgbClr val="12160F"/>
+                </a:solidFill>
+                <a:latin typeface="Calibri"/>
+              </a:rPr>
+              <a:t>·  Non-outcome: platform shortlist, savings target, fraud programme, L3 design.</a:t>
+            </a:r>
+          </a:p>
+          <a:p>
+            <a:pPr>
+              <a:spcAft>
+                <a:spcPts val="800"/>
+              </a:spcAft>
+            </a:pPr>
+            <a:r>
+              <a:rPr sz="1600">
+                <a:solidFill>
+                  <a:srgbClr val="12160F"/>
+                </a:solidFill>
+                <a:latin typeface="Calibri"/>
+              </a:rPr>
+              <a:t>·  Banned claims stay banned in the room.</a:t>
+            </a:r>
+          </a:p>
+          <a:p>
+            <a:pPr>
+              <a:spcAft>
+                <a:spcPts val="800"/>
+              </a:spcAft>
+            </a:pPr>
+            <a:r>
+              <a:rPr sz="1600">
+                <a:solidFill>
+                  <a:srgbClr val="12160F"/>
+                </a:solidFill>
+                <a:latin typeface="Calibri"/>
+              </a:rPr>
+              <a:t>·  Check: everyone can say “prepare is not execute.”</a:t>
             </a:r>
           </a:p>
         </p:txBody>
@@ -3236,61 +4969,1809 @@
       <p:grpSpPr/>
       <p:sp>
         <p:nvSpPr>
-          <p:cNvPr id="2" name="Title 1"/>
-          <p:cNvSpPr>
-            <a:spLocks noGrp="1"/>
-          </p:cNvSpPr>
-          <p:nvPr>
-            <p:ph type="title"/>
-          </p:nvPr>
-        </p:nvSpPr>
-        <p:spPr/>
-        <p:txBody>
-          <a:bodyPr/>
-          <a:lstStyle/>
-          <a:p>
-            <a:r>
-              <a:t>Afternoon</a:t>
-            </a:r>
-          </a:p>
-        </p:txBody>
-      </p:sp>
-      <p:sp>
-        <p:nvSpPr>
-          <p:cNvPr id="3" name="Content Placeholder 2"/>
-          <p:cNvSpPr>
-            <a:spLocks noGrp="1"/>
-          </p:cNvSpPr>
-          <p:nvPr>
-            <p:ph idx="1"/>
-          </p:nvPr>
-        </p:nvSpPr>
-        <p:spPr/>
-        <p:txBody>
-          <a:bodyPr/>
-          <a:lstStyle/>
-          <a:p>
-            <a:pPr/>
-            <a:r>
-              <a:t>13:00 Charter two agents (Matching + Triage).</a:t>
-            </a:r>
-          </a:p>
-          <a:p>
-            <a:pPr/>
-            <a:r>
-              <a:t>14:15 Controls and SoD.</a:t>
-            </a:r>
-          </a:p>
-          <a:p>
-            <a:pPr/>
-            <a:r>
-              <a:t>15:15 Shadow and UAT design.</a:t>
-            </a:r>
-          </a:p>
-          <a:p>
-            <a:pPr/>
-            <a:r>
-              <a:t>16:00 Steering decision: commission / wait / refuse the frame.</a:t>
+          <p:cNvPr id="2" name="Rectangle 1"/>
+          <p:cNvSpPr/>
+          <p:nvPr/>
+        </p:nvSpPr>
+        <p:spPr>
+          <a:xfrm>
+            <a:off x="0" y="0"/>
+            <a:ext cx="9144000" cy="6858000"/>
+          </a:xfrm>
+          <a:prstGeom prst="rect">
+            <a:avLst/>
+          </a:prstGeom>
+          <a:solidFill>
+            <a:srgbClr val="F3EEE4"/>
+          </a:solidFill>
+          <a:ln>
+            <a:noFill/>
+          </a:ln>
+        </p:spPr>
+        <p:style>
+          <a:lnRef idx="1">
+            <a:schemeClr val="accent1"/>
+          </a:lnRef>
+          <a:fillRef idx="3">
+            <a:schemeClr val="accent1"/>
+          </a:fillRef>
+          <a:effectRef idx="2">
+            <a:schemeClr val="accent1"/>
+          </a:effectRef>
+          <a:fontRef idx="minor">
+            <a:schemeClr val="lt1"/>
+          </a:fontRef>
+        </p:style>
+        <p:txBody>
+          <a:bodyPr rtlCol="0" anchor="ctr"/>
+          <a:lstStyle/>
+          <a:p>
+            <a:pPr algn="ctr"/>
+          </a:p>
+        </p:txBody>
+      </p:sp>
+      <p:sp>
+        <p:nvSpPr>
+          <p:cNvPr id="3" name="Rectangle 2"/>
+          <p:cNvSpPr/>
+          <p:nvPr/>
+        </p:nvSpPr>
+        <p:spPr>
+          <a:xfrm>
+            <a:off x="0" y="0"/>
+            <a:ext cx="73152" cy="6858000"/>
+          </a:xfrm>
+          <a:prstGeom prst="rect">
+            <a:avLst/>
+          </a:prstGeom>
+          <a:solidFill>
+            <a:srgbClr val="B0893E"/>
+          </a:solidFill>
+          <a:ln>
+            <a:noFill/>
+          </a:ln>
+        </p:spPr>
+        <p:style>
+          <a:lnRef idx="1">
+            <a:schemeClr val="accent1"/>
+          </a:lnRef>
+          <a:fillRef idx="3">
+            <a:schemeClr val="accent1"/>
+          </a:fillRef>
+          <a:effectRef idx="2">
+            <a:schemeClr val="accent1"/>
+          </a:effectRef>
+          <a:fontRef idx="minor">
+            <a:schemeClr val="lt1"/>
+          </a:fontRef>
+        </p:style>
+        <p:txBody>
+          <a:bodyPr rtlCol="0" anchor="ctr"/>
+          <a:lstStyle/>
+          <a:p>
+            <a:pPr algn="ctr"/>
+          </a:p>
+        </p:txBody>
+      </p:sp>
+      <p:sp>
+        <p:nvSpPr>
+          <p:cNvPr id="4" name="TextBox 3"/>
+          <p:cNvSpPr txBox="1"/>
+          <p:nvPr/>
+        </p:nvSpPr>
+        <p:spPr>
+          <a:xfrm>
+            <a:off x="365760" y="164592"/>
+            <a:ext cx="8412480" cy="256032"/>
+          </a:xfrm>
+          <a:prstGeom prst="rect">
+            <a:avLst/>
+          </a:prstGeom>
+          <a:noFill/>
+        </p:spPr>
+        <p:txBody>
+          <a:bodyPr wrap="square">
+            <a:spAutoFit/>
+          </a:bodyPr>
+          <a:lstStyle/>
+          <a:p>
+            <a:pPr algn="l"/>
+            <a:r>
+              <a:rPr sz="1000" b="0">
+                <a:solidFill>
+                  <a:srgbClr val="B0893E"/>
+                </a:solidFill>
+                <a:latin typeface="Calibri"/>
+              </a:rPr>
+              <a:t>EVIDENCE ROOM — AP AGENT OS   ·   Wall</a:t>
+            </a:r>
+          </a:p>
+        </p:txBody>
+      </p:sp>
+      <p:sp>
+        <p:nvSpPr>
+          <p:cNvPr id="5" name="TextBox 4"/>
+          <p:cNvSpPr txBox="1"/>
+          <p:nvPr/>
+        </p:nvSpPr>
+        <p:spPr>
+          <a:xfrm>
+            <a:off x="365760" y="502920"/>
+            <a:ext cx="8412480" cy="731520"/>
+          </a:xfrm>
+          <a:prstGeom prst="rect">
+            <a:avLst/>
+          </a:prstGeom>
+          <a:noFill/>
+        </p:spPr>
+        <p:txBody>
+          <a:bodyPr wrap="square">
+            <a:spAutoFit/>
+          </a:bodyPr>
+          <a:lstStyle/>
+          <a:p>
+            <a:pPr algn="l"/>
+            <a:r>
+              <a:rPr sz="2600" b="0">
+                <a:solidFill>
+                  <a:srgbClr val="12160F"/>
+                </a:solidFill>
+                <a:latin typeface="Georgia"/>
+              </a:rPr>
+              <a:t>Two sentences on the wall before 09:00</a:t>
+            </a:r>
+          </a:p>
+        </p:txBody>
+      </p:sp>
+      <p:sp>
+        <p:nvSpPr>
+          <p:cNvPr id="6" name="TextBox 5"/>
+          <p:cNvSpPr txBox="1"/>
+          <p:nvPr/>
+        </p:nvSpPr>
+        <p:spPr>
+          <a:xfrm>
+            <a:off x="365760" y="1371600"/>
+            <a:ext cx="8321040" cy="4937760"/>
+          </a:xfrm>
+          <a:prstGeom prst="rect">
+            <a:avLst/>
+          </a:prstGeom>
+          <a:noFill/>
+        </p:spPr>
+        <p:txBody>
+          <a:bodyPr wrap="square">
+            <a:spAutoFit/>
+          </a:bodyPr>
+          <a:lstStyle/>
+          <a:p>
+            <a:pPr>
+              <a:spcAft>
+                <a:spcPts val="800"/>
+              </a:spcAft>
+            </a:pPr>
+            <a:r>
+              <a:rPr sz="1600">
+                <a:solidFill>
+                  <a:srgbClr val="12160F"/>
+                </a:solidFill>
+                <a:latin typeface="Calibri"/>
+              </a:rPr>
+              <a:t>·  ERP is the system of record for accounting.</a:t>
+            </a:r>
+          </a:p>
+          <a:p>
+            <a:pPr>
+              <a:spcAft>
+                <a:spcPts val="800"/>
+              </a:spcAft>
+            </a:pPr>
+            <a:r>
+              <a:rPr sz="1600">
+                <a:solidFill>
+                  <a:srgbClr val="12160F"/>
+                </a:solidFill>
+                <a:latin typeface="Calibri"/>
+              </a:rPr>
+              <a:t>·  Named humans are the system of record for cash.</a:t>
+            </a:r>
+          </a:p>
+          <a:p>
+            <a:pPr>
+              <a:spcAft>
+                <a:spcPts val="800"/>
+              </a:spcAft>
+            </a:pPr>
+            <a:r>
+              <a:rPr sz="1600">
+                <a:solidFill>
+                  <a:srgbClr val="12160F"/>
+                </a:solidFill>
+                <a:latin typeface="Calibri"/>
+              </a:rPr>
+              <a:t>·  Participants write their role on a card. No opening video.</a:t>
+            </a:r>
+          </a:p>
+          <a:p>
+            <a:pPr>
+              <a:spcAft>
+                <a:spcPts val="800"/>
+              </a:spcAft>
+            </a:pPr>
+            <a:r>
+              <a:rPr sz="1600">
+                <a:solidFill>
+                  <a:srgbClr val="12160F"/>
+                </a:solidFill>
+                <a:latin typeface="Calibri"/>
+              </a:rPr>
+              <a:t>·  Treasury repeats the payment sentence before lunch.</a:t>
+            </a:r>
+          </a:p>
+        </p:txBody>
+      </p:sp>
+    </p:spTree>
+  </p:cSld>
+  <p:clrMapOvr>
+    <a:masterClrMapping/>
+  </p:clrMapOvr>
+</p:sld>
+</file>
+
+<file path=ppt/slides/slide4.xml><?xml version="1.0" encoding="utf-8"?>
+<p:sld xmlns:a="http://schemas.openxmlformats.org/drawingml/2006/main" xmlns:p="http://schemas.openxmlformats.org/presentationml/2006/main" xmlns:r="http://schemas.openxmlformats.org/officeDocument/2006/relationships">
+  <p:cSld>
+    <p:spTree>
+      <p:nvGrpSpPr>
+        <p:cNvPr id="1" name=""/>
+        <p:cNvGrpSpPr/>
+        <p:nvPr/>
+      </p:nvGrpSpPr>
+      <p:grpSpPr/>
+      <p:sp>
+        <p:nvSpPr>
+          <p:cNvPr id="2" name="Rectangle 1"/>
+          <p:cNvSpPr/>
+          <p:nvPr/>
+        </p:nvSpPr>
+        <p:spPr>
+          <a:xfrm>
+            <a:off x="0" y="0"/>
+            <a:ext cx="9144000" cy="6858000"/>
+          </a:xfrm>
+          <a:prstGeom prst="rect">
+            <a:avLst/>
+          </a:prstGeom>
+          <a:solidFill>
+            <a:srgbClr val="F3EEE4"/>
+          </a:solidFill>
+          <a:ln>
+            <a:noFill/>
+          </a:ln>
+        </p:spPr>
+        <p:style>
+          <a:lnRef idx="1">
+            <a:schemeClr val="accent1"/>
+          </a:lnRef>
+          <a:fillRef idx="3">
+            <a:schemeClr val="accent1"/>
+          </a:fillRef>
+          <a:effectRef idx="2">
+            <a:schemeClr val="accent1"/>
+          </a:effectRef>
+          <a:fontRef idx="minor">
+            <a:schemeClr val="lt1"/>
+          </a:fontRef>
+        </p:style>
+        <p:txBody>
+          <a:bodyPr rtlCol="0" anchor="ctr"/>
+          <a:lstStyle/>
+          <a:p>
+            <a:pPr algn="ctr"/>
+          </a:p>
+        </p:txBody>
+      </p:sp>
+      <p:sp>
+        <p:nvSpPr>
+          <p:cNvPr id="3" name="Rectangle 2"/>
+          <p:cNvSpPr/>
+          <p:nvPr/>
+        </p:nvSpPr>
+        <p:spPr>
+          <a:xfrm>
+            <a:off x="0" y="0"/>
+            <a:ext cx="73152" cy="6858000"/>
+          </a:xfrm>
+          <a:prstGeom prst="rect">
+            <a:avLst/>
+          </a:prstGeom>
+          <a:solidFill>
+            <a:srgbClr val="B0893E"/>
+          </a:solidFill>
+          <a:ln>
+            <a:noFill/>
+          </a:ln>
+        </p:spPr>
+        <p:style>
+          <a:lnRef idx="1">
+            <a:schemeClr val="accent1"/>
+          </a:lnRef>
+          <a:fillRef idx="3">
+            <a:schemeClr val="accent1"/>
+          </a:fillRef>
+          <a:effectRef idx="2">
+            <a:schemeClr val="accent1"/>
+          </a:effectRef>
+          <a:fontRef idx="minor">
+            <a:schemeClr val="lt1"/>
+          </a:fontRef>
+        </p:style>
+        <p:txBody>
+          <a:bodyPr rtlCol="0" anchor="ctr"/>
+          <a:lstStyle/>
+          <a:p>
+            <a:pPr algn="ctr"/>
+          </a:p>
+        </p:txBody>
+      </p:sp>
+      <p:sp>
+        <p:nvSpPr>
+          <p:cNvPr id="4" name="TextBox 3"/>
+          <p:cNvSpPr txBox="1"/>
+          <p:nvPr/>
+        </p:nvSpPr>
+        <p:spPr>
+          <a:xfrm>
+            <a:off x="365760" y="164592"/>
+            <a:ext cx="8412480" cy="256032"/>
+          </a:xfrm>
+          <a:prstGeom prst="rect">
+            <a:avLst/>
+          </a:prstGeom>
+          <a:noFill/>
+        </p:spPr>
+        <p:txBody>
+          <a:bodyPr wrap="square">
+            <a:spAutoFit/>
+          </a:bodyPr>
+          <a:lstStyle/>
+          <a:p>
+            <a:pPr algn="l"/>
+            <a:r>
+              <a:rPr sz="1000" b="0">
+                <a:solidFill>
+                  <a:srgbClr val="B0893E"/>
+                </a:solidFill>
+                <a:latin typeface="Calibri"/>
+              </a:rPr>
+              <a:t>EVIDENCE ROOM — AP AGENT OS   ·   09:00</a:t>
+            </a:r>
+          </a:p>
+        </p:txBody>
+      </p:sp>
+      <p:sp>
+        <p:nvSpPr>
+          <p:cNvPr id="5" name="TextBox 4"/>
+          <p:cNvSpPr txBox="1"/>
+          <p:nvPr/>
+        </p:nvSpPr>
+        <p:spPr>
+          <a:xfrm>
+            <a:off x="365760" y="502920"/>
+            <a:ext cx="8412480" cy="731520"/>
+          </a:xfrm>
+          <a:prstGeom prst="rect">
+            <a:avLst/>
+          </a:prstGeom>
+          <a:noFill/>
+        </p:spPr>
+        <p:txBody>
+          <a:bodyPr wrap="square">
+            <a:spAutoFit/>
+          </a:bodyPr>
+          <a:lstStyle/>
+          <a:p>
+            <a:pPr algn="l"/>
+            <a:r>
+              <a:rPr sz="2600" b="0">
+                <a:solidFill>
+                  <a:srgbClr val="12160F"/>
+                </a:solidFill>
+                <a:latin typeface="Georgia"/>
+              </a:rPr>
+              <a:t>Contract of the day (20 minutes)</a:t>
+            </a:r>
+          </a:p>
+        </p:txBody>
+      </p:sp>
+      <p:sp>
+        <p:nvSpPr>
+          <p:cNvPr id="6" name="TextBox 5"/>
+          <p:cNvSpPr txBox="1"/>
+          <p:nvPr/>
+        </p:nvSpPr>
+        <p:spPr>
+          <a:xfrm>
+            <a:off x="365760" y="1371600"/>
+            <a:ext cx="8321040" cy="4937760"/>
+          </a:xfrm>
+          <a:prstGeom prst="rect">
+            <a:avLst/>
+          </a:prstGeom>
+          <a:noFill/>
+        </p:spPr>
+        <p:txBody>
+          <a:bodyPr wrap="square">
+            <a:spAutoFit/>
+          </a:bodyPr>
+          <a:lstStyle/>
+          <a:p>
+            <a:pPr>
+              <a:spcAft>
+                <a:spcPts val="800"/>
+              </a:spcAft>
+            </a:pPr>
+            <a:r>
+              <a:rPr sz="1600">
+                <a:solidFill>
+                  <a:srgbClr val="12160F"/>
+                </a:solidFill>
+                <a:latin typeface="Calibri"/>
+              </a:rPr>
+              <a:t>·  What this is: operating system for an agent layer.</a:t>
+            </a:r>
+          </a:p>
+          <a:p>
+            <a:pPr>
+              <a:spcAft>
+                <a:spcPts val="800"/>
+              </a:spcAft>
+            </a:pPr>
+            <a:r>
+              <a:rPr sz="1600">
+                <a:solidFill>
+                  <a:srgbClr val="12160F"/>
+                </a:solidFill>
+                <a:latin typeface="Calibri"/>
+              </a:rPr>
+              <a:t>·  What this is not: ERP project, payment product, prompt class.</a:t>
+            </a:r>
+          </a:p>
+          <a:p>
+            <a:pPr>
+              <a:spcAft>
+                <a:spcPts val="800"/>
+              </a:spcAft>
+            </a:pPr>
+            <a:r>
+              <a:rPr sz="1600">
+                <a:solidFill>
+                  <a:srgbClr val="12160F"/>
+                </a:solidFill>
+                <a:latin typeface="Calibri"/>
+              </a:rPr>
+              <a:t>·  Payment sentence. Ask Treasury to repeat it.</a:t>
+            </a:r>
+          </a:p>
+          <a:p>
+            <a:pPr>
+              <a:spcAft>
+                <a:spcPts val="800"/>
+              </a:spcAft>
+            </a:pPr>
+            <a:r>
+              <a:rPr sz="1600">
+                <a:solidFill>
+                  <a:srgbClr val="12160F"/>
+                </a:solidFill>
+                <a:latin typeface="Calibri"/>
+              </a:rPr>
+              <a:t>·  Banned claims: savings guarantee, fraud detection, compliance, accuracy, autonomous pay.</a:t>
+            </a:r>
+          </a:p>
+        </p:txBody>
+      </p:sp>
+    </p:spTree>
+  </p:cSld>
+  <p:clrMapOvr>
+    <a:masterClrMapping/>
+  </p:clrMapOvr>
+</p:sld>
+</file>
+
+<file path=ppt/slides/slide5.xml><?xml version="1.0" encoding="utf-8"?>
+<p:sld xmlns:a="http://schemas.openxmlformats.org/drawingml/2006/main" xmlns:p="http://schemas.openxmlformats.org/presentationml/2006/main" xmlns:r="http://schemas.openxmlformats.org/officeDocument/2006/relationships">
+  <p:cSld>
+    <p:spTree>
+      <p:nvGrpSpPr>
+        <p:cNvPr id="1" name=""/>
+        <p:cNvGrpSpPr/>
+        <p:nvPr/>
+      </p:nvGrpSpPr>
+      <p:grpSpPr/>
+      <p:sp>
+        <p:nvSpPr>
+          <p:cNvPr id="2" name="Rectangle 1"/>
+          <p:cNvSpPr/>
+          <p:nvPr/>
+        </p:nvSpPr>
+        <p:spPr>
+          <a:xfrm>
+            <a:off x="0" y="0"/>
+            <a:ext cx="9144000" cy="6858000"/>
+          </a:xfrm>
+          <a:prstGeom prst="rect">
+            <a:avLst/>
+          </a:prstGeom>
+          <a:solidFill>
+            <a:srgbClr val="F3EEE4"/>
+          </a:solidFill>
+          <a:ln>
+            <a:noFill/>
+          </a:ln>
+        </p:spPr>
+        <p:style>
+          <a:lnRef idx="1">
+            <a:schemeClr val="accent1"/>
+          </a:lnRef>
+          <a:fillRef idx="3">
+            <a:schemeClr val="accent1"/>
+          </a:fillRef>
+          <a:effectRef idx="2">
+            <a:schemeClr val="accent1"/>
+          </a:effectRef>
+          <a:fontRef idx="minor">
+            <a:schemeClr val="lt1"/>
+          </a:fontRef>
+        </p:style>
+        <p:txBody>
+          <a:bodyPr rtlCol="0" anchor="ctr"/>
+          <a:lstStyle/>
+          <a:p>
+            <a:pPr algn="ctr"/>
+          </a:p>
+        </p:txBody>
+      </p:sp>
+      <p:sp>
+        <p:nvSpPr>
+          <p:cNvPr id="3" name="Rectangle 2"/>
+          <p:cNvSpPr/>
+          <p:nvPr/>
+        </p:nvSpPr>
+        <p:spPr>
+          <a:xfrm>
+            <a:off x="0" y="0"/>
+            <a:ext cx="73152" cy="6858000"/>
+          </a:xfrm>
+          <a:prstGeom prst="rect">
+            <a:avLst/>
+          </a:prstGeom>
+          <a:solidFill>
+            <a:srgbClr val="B0893E"/>
+          </a:solidFill>
+          <a:ln>
+            <a:noFill/>
+          </a:ln>
+        </p:spPr>
+        <p:style>
+          <a:lnRef idx="1">
+            <a:schemeClr val="accent1"/>
+          </a:lnRef>
+          <a:fillRef idx="3">
+            <a:schemeClr val="accent1"/>
+          </a:fillRef>
+          <a:effectRef idx="2">
+            <a:schemeClr val="accent1"/>
+          </a:effectRef>
+          <a:fontRef idx="minor">
+            <a:schemeClr val="lt1"/>
+          </a:fontRef>
+        </p:style>
+        <p:txBody>
+          <a:bodyPr rtlCol="0" anchor="ctr"/>
+          <a:lstStyle/>
+          <a:p>
+            <a:pPr algn="ctr"/>
+          </a:p>
+        </p:txBody>
+      </p:sp>
+      <p:sp>
+        <p:nvSpPr>
+          <p:cNvPr id="4" name="TextBox 3"/>
+          <p:cNvSpPr txBox="1"/>
+          <p:nvPr/>
+        </p:nvSpPr>
+        <p:spPr>
+          <a:xfrm>
+            <a:off x="365760" y="164592"/>
+            <a:ext cx="8412480" cy="256032"/>
+          </a:xfrm>
+          <a:prstGeom prst="rect">
+            <a:avLst/>
+          </a:prstGeom>
+          <a:noFill/>
+        </p:spPr>
+        <p:txBody>
+          <a:bodyPr wrap="square">
+            <a:spAutoFit/>
+          </a:bodyPr>
+          <a:lstStyle/>
+          <a:p>
+            <a:pPr algn="l"/>
+            <a:r>
+              <a:rPr sz="1000" b="0">
+                <a:solidFill>
+                  <a:srgbClr val="B0893E"/>
+                </a:solidFill>
+                <a:latin typeface="Calibri"/>
+              </a:rPr>
+              <a:t>EVIDENCE ROOM — AP AGENT OS   ·   09:20</a:t>
+            </a:r>
+          </a:p>
+        </p:txBody>
+      </p:sp>
+      <p:sp>
+        <p:nvSpPr>
+          <p:cNvPr id="5" name="TextBox 4"/>
+          <p:cNvSpPr txBox="1"/>
+          <p:nvPr/>
+        </p:nvSpPr>
+        <p:spPr>
+          <a:xfrm>
+            <a:off x="365760" y="502920"/>
+            <a:ext cx="8412480" cy="731520"/>
+          </a:xfrm>
+          <a:prstGeom prst="rect">
+            <a:avLst/>
+          </a:prstGeom>
+          <a:noFill/>
+        </p:spPr>
+        <p:txBody>
+          <a:bodyPr wrap="square">
+            <a:spAutoFit/>
+          </a:bodyPr>
+          <a:lstStyle/>
+          <a:p>
+            <a:pPr algn="l"/>
+            <a:r>
+              <a:rPr sz="2600" b="0">
+                <a:solidFill>
+                  <a:srgbClr val="12160F"/>
+                </a:solidFill>
+                <a:latin typeface="Georgia"/>
+              </a:rPr>
+              <a:t>Exercise 1 — Diagnostic lightning</a:t>
+            </a:r>
+          </a:p>
+        </p:txBody>
+      </p:sp>
+      <p:sp>
+        <p:nvSpPr>
+          <p:cNvPr id="6" name="TextBox 5"/>
+          <p:cNvSpPr txBox="1"/>
+          <p:nvPr/>
+        </p:nvSpPr>
+        <p:spPr>
+          <a:xfrm>
+            <a:off x="365760" y="1371600"/>
+            <a:ext cx="8321040" cy="4937760"/>
+          </a:xfrm>
+          <a:prstGeom prst="rect">
+            <a:avLst/>
+          </a:prstGeom>
+          <a:noFill/>
+        </p:spPr>
+        <p:txBody>
+          <a:bodyPr wrap="square">
+            <a:spAutoFit/>
+          </a:bodyPr>
+          <a:lstStyle/>
+          <a:p>
+            <a:pPr>
+              <a:spcAft>
+                <a:spcPts val="800"/>
+              </a:spcAft>
+            </a:pPr>
+            <a:r>
+              <a:rPr sz="1600">
+                <a:solidFill>
+                  <a:srgbClr val="12160F"/>
+                </a:solidFill>
+                <a:latin typeface="Calibri"/>
+              </a:rPr>
+              <a:t>·  36 questions. Score as a room. Challenger is Controls.</a:t>
+            </a:r>
+          </a:p>
+          <a:p>
+            <a:pPr>
+              <a:spcAft>
+                <a:spcPts val="800"/>
+              </a:spcAft>
+            </a:pPr>
+            <a:r>
+              <a:rPr sz="1600">
+                <a:solidFill>
+                  <a:srgbClr val="12160F"/>
+                </a:solidFill>
+                <a:latin typeface="Calibri"/>
+              </a:rPr>
+              <a:t>·  Output: six dimension averages, vetoes, band sentence on the wall.</a:t>
+            </a:r>
+          </a:p>
+          <a:p>
+            <a:pPr>
+              <a:spcAft>
+                <a:spcPts val="800"/>
+              </a:spcAft>
+            </a:pPr>
+            <a:r>
+              <a:rPr sz="1600">
+                <a:solidFill>
+                  <a:srgbClr val="12160F"/>
+                </a:solidFill>
+                <a:latin typeface="Calibri"/>
+              </a:rPr>
+              <a:t>·  If C1 is disputed, do not average — reconstruct the last payment run after the break.</a:t>
+            </a:r>
+          </a:p>
+          <a:p>
+            <a:pPr>
+              <a:spcAft>
+                <a:spcPts val="800"/>
+              </a:spcAft>
+            </a:pPr>
+            <a:r>
+              <a:rPr sz="1600">
+                <a:solidFill>
+                  <a:srgbClr val="12160F"/>
+                </a:solidFill>
+                <a:latin typeface="Calibri"/>
+              </a:rPr>
+              <a:t>·  A5 at 0 or 1 vetoes placement above maturity L2.</a:t>
+            </a:r>
+          </a:p>
+        </p:txBody>
+      </p:sp>
+    </p:spTree>
+  </p:cSld>
+  <p:clrMapOvr>
+    <a:masterClrMapping/>
+  </p:clrMapOvr>
+</p:sld>
+</file>
+
+<file path=ppt/slides/slide6.xml><?xml version="1.0" encoding="utf-8"?>
+<p:sld xmlns:a="http://schemas.openxmlformats.org/drawingml/2006/main" xmlns:p="http://schemas.openxmlformats.org/presentationml/2006/main" xmlns:r="http://schemas.openxmlformats.org/officeDocument/2006/relationships">
+  <p:cSld>
+    <p:spTree>
+      <p:nvGrpSpPr>
+        <p:cNvPr id="1" name=""/>
+        <p:cNvGrpSpPr/>
+        <p:nvPr/>
+      </p:nvGrpSpPr>
+      <p:grpSpPr/>
+      <p:sp>
+        <p:nvSpPr>
+          <p:cNvPr id="2" name="Rectangle 1"/>
+          <p:cNvSpPr/>
+          <p:nvPr/>
+        </p:nvSpPr>
+        <p:spPr>
+          <a:xfrm>
+            <a:off x="0" y="0"/>
+            <a:ext cx="9144000" cy="6858000"/>
+          </a:xfrm>
+          <a:prstGeom prst="rect">
+            <a:avLst/>
+          </a:prstGeom>
+          <a:solidFill>
+            <a:srgbClr val="F3EEE4"/>
+          </a:solidFill>
+          <a:ln>
+            <a:noFill/>
+          </a:ln>
+        </p:spPr>
+        <p:style>
+          <a:lnRef idx="1">
+            <a:schemeClr val="accent1"/>
+          </a:lnRef>
+          <a:fillRef idx="3">
+            <a:schemeClr val="accent1"/>
+          </a:fillRef>
+          <a:effectRef idx="2">
+            <a:schemeClr val="accent1"/>
+          </a:effectRef>
+          <a:fontRef idx="minor">
+            <a:schemeClr val="lt1"/>
+          </a:fontRef>
+        </p:style>
+        <p:txBody>
+          <a:bodyPr rtlCol="0" anchor="ctr"/>
+          <a:lstStyle/>
+          <a:p>
+            <a:pPr algn="ctr"/>
+          </a:p>
+        </p:txBody>
+      </p:sp>
+      <p:sp>
+        <p:nvSpPr>
+          <p:cNvPr id="3" name="Rectangle 2"/>
+          <p:cNvSpPr/>
+          <p:nvPr/>
+        </p:nvSpPr>
+        <p:spPr>
+          <a:xfrm>
+            <a:off x="0" y="0"/>
+            <a:ext cx="73152" cy="6858000"/>
+          </a:xfrm>
+          <a:prstGeom prst="rect">
+            <a:avLst/>
+          </a:prstGeom>
+          <a:solidFill>
+            <a:srgbClr val="B0893E"/>
+          </a:solidFill>
+          <a:ln>
+            <a:noFill/>
+          </a:ln>
+        </p:spPr>
+        <p:style>
+          <a:lnRef idx="1">
+            <a:schemeClr val="accent1"/>
+          </a:lnRef>
+          <a:fillRef idx="3">
+            <a:schemeClr val="accent1"/>
+          </a:fillRef>
+          <a:effectRef idx="2">
+            <a:schemeClr val="accent1"/>
+          </a:effectRef>
+          <a:fontRef idx="minor">
+            <a:schemeClr val="lt1"/>
+          </a:fontRef>
+        </p:style>
+        <p:txBody>
+          <a:bodyPr rtlCol="0" anchor="ctr"/>
+          <a:lstStyle/>
+          <a:p>
+            <a:pPr algn="ctr"/>
+          </a:p>
+        </p:txBody>
+      </p:sp>
+      <p:sp>
+        <p:nvSpPr>
+          <p:cNvPr id="4" name="TextBox 3"/>
+          <p:cNvSpPr txBox="1"/>
+          <p:nvPr/>
+        </p:nvSpPr>
+        <p:spPr>
+          <a:xfrm>
+            <a:off x="365760" y="164592"/>
+            <a:ext cx="8412480" cy="256032"/>
+          </a:xfrm>
+          <a:prstGeom prst="rect">
+            <a:avLst/>
+          </a:prstGeom>
+          <a:noFill/>
+        </p:spPr>
+        <p:txBody>
+          <a:bodyPr wrap="square">
+            <a:spAutoFit/>
+          </a:bodyPr>
+          <a:lstStyle/>
+          <a:p>
+            <a:pPr algn="l"/>
+            <a:r>
+              <a:rPr sz="1000" b="0">
+                <a:solidFill>
+                  <a:srgbClr val="B0893E"/>
+                </a:solidFill>
+                <a:latin typeface="Calibri"/>
+              </a:rPr>
+              <a:t>EVIDENCE ROOM — AP AGENT OS   ·   10:35</a:t>
+            </a:r>
+          </a:p>
+        </p:txBody>
+      </p:sp>
+      <p:sp>
+        <p:nvSpPr>
+          <p:cNvPr id="5" name="TextBox 4"/>
+          <p:cNvSpPr txBox="1"/>
+          <p:nvPr/>
+        </p:nvSpPr>
+        <p:spPr>
+          <a:xfrm>
+            <a:off x="365760" y="502920"/>
+            <a:ext cx="8412480" cy="731520"/>
+          </a:xfrm>
+          <a:prstGeom prst="rect">
+            <a:avLst/>
+          </a:prstGeom>
+          <a:noFill/>
+        </p:spPr>
+        <p:txBody>
+          <a:bodyPr wrap="square">
+            <a:spAutoFit/>
+          </a:bodyPr>
+          <a:lstStyle/>
+          <a:p>
+            <a:pPr algn="l"/>
+            <a:r>
+              <a:rPr sz="2600" b="0">
+                <a:solidFill>
+                  <a:srgbClr val="12160F"/>
+                </a:solidFill>
+                <a:latin typeface="Georgia"/>
+              </a:rPr>
+              <a:t>Exercise 2 — Ten exceptions + one payment run</a:t>
+            </a:r>
+          </a:p>
+        </p:txBody>
+      </p:sp>
+      <p:sp>
+        <p:nvSpPr>
+          <p:cNvPr id="6" name="TextBox 5"/>
+          <p:cNvSpPr txBox="1"/>
+          <p:nvPr/>
+        </p:nvSpPr>
+        <p:spPr>
+          <a:xfrm>
+            <a:off x="365760" y="1371600"/>
+            <a:ext cx="8321040" cy="4937760"/>
+          </a:xfrm>
+          <a:prstGeom prst="rect">
+            <a:avLst/>
+          </a:prstGeom>
+          <a:noFill/>
+        </p:spPr>
+        <p:txBody>
+          <a:bodyPr wrap="square">
+            <a:spAutoFit/>
+          </a:bodyPr>
+          <a:lstStyle/>
+          <a:p>
+            <a:pPr>
+              <a:spcAft>
+                <a:spcPts val="800"/>
+              </a:spcAft>
+            </a:pPr>
+            <a:r>
+              <a:rPr sz="1600">
+                <a:solidFill>
+                  <a:srgbClr val="12160F"/>
+                </a:solidFill>
+                <a:latin typeface="Calibri"/>
+              </a:rPr>
+              <a:t>·  Groups of three: Match + Controls + Transformation; Ops + Payments + Process Owner.</a:t>
+            </a:r>
+          </a:p>
+          <a:p>
+            <a:pPr>
+              <a:spcAft>
+                <a:spcPts val="800"/>
+              </a:spcAft>
+            </a:pPr>
+            <a:r>
+              <a:rPr sz="1600">
+                <a:solidFill>
+                  <a:srgbClr val="12160F"/>
+                </a:solidFill>
+                <a:latin typeface="Calibri"/>
+              </a:rPr>
+              <a:t>·  Classify from the closed list. No free-text “other” as a culture.</a:t>
+            </a:r>
+          </a:p>
+          <a:p>
+            <a:pPr>
+              <a:spcAft>
+                <a:spcPts val="800"/>
+              </a:spcAft>
+            </a:pPr>
+            <a:r>
+              <a:rPr sz="1600">
+                <a:solidFill>
+                  <a:srgbClr val="12160F"/>
+                </a:solidFill>
+                <a:latin typeface="Calibri"/>
+              </a:rPr>
+              <a:t>·  Output: class A–J table; list of demo temptations; at least one Class A refusal written.</a:t>
+            </a:r>
+          </a:p>
+          <a:p>
+            <a:pPr>
+              <a:spcAft>
+                <a:spcPts val="800"/>
+              </a:spcAft>
+            </a:pPr>
+            <a:r>
+              <a:rPr sz="1600">
+                <a:solidFill>
+                  <a:srgbClr val="12160F"/>
+                </a:solidFill>
+                <a:latin typeface="Calibri"/>
+              </a:rPr>
+              <a:t>·  Dummy GR and invented PO are Class A refusals.</a:t>
+            </a:r>
+          </a:p>
+        </p:txBody>
+      </p:sp>
+    </p:spTree>
+  </p:cSld>
+  <p:clrMapOvr>
+    <a:masterClrMapping/>
+  </p:clrMapOvr>
+</p:sld>
+</file>
+
+<file path=ppt/slides/slide7.xml><?xml version="1.0" encoding="utf-8"?>
+<p:sld xmlns:a="http://schemas.openxmlformats.org/drawingml/2006/main" xmlns:p="http://schemas.openxmlformats.org/presentationml/2006/main" xmlns:r="http://schemas.openxmlformats.org/officeDocument/2006/relationships">
+  <p:cSld>
+    <p:spTree>
+      <p:nvGrpSpPr>
+        <p:cNvPr id="1" name=""/>
+        <p:cNvGrpSpPr/>
+        <p:nvPr/>
+      </p:nvGrpSpPr>
+      <p:grpSpPr/>
+      <p:sp>
+        <p:nvSpPr>
+          <p:cNvPr id="2" name="Rectangle 1"/>
+          <p:cNvSpPr/>
+          <p:nvPr/>
+        </p:nvSpPr>
+        <p:spPr>
+          <a:xfrm>
+            <a:off x="0" y="0"/>
+            <a:ext cx="9144000" cy="6858000"/>
+          </a:xfrm>
+          <a:prstGeom prst="rect">
+            <a:avLst/>
+          </a:prstGeom>
+          <a:solidFill>
+            <a:srgbClr val="F3EEE4"/>
+          </a:solidFill>
+          <a:ln>
+            <a:noFill/>
+          </a:ln>
+        </p:spPr>
+        <p:style>
+          <a:lnRef idx="1">
+            <a:schemeClr val="accent1"/>
+          </a:lnRef>
+          <a:fillRef idx="3">
+            <a:schemeClr val="accent1"/>
+          </a:fillRef>
+          <a:effectRef idx="2">
+            <a:schemeClr val="accent1"/>
+          </a:effectRef>
+          <a:fontRef idx="minor">
+            <a:schemeClr val="lt1"/>
+          </a:fontRef>
+        </p:style>
+        <p:txBody>
+          <a:bodyPr rtlCol="0" anchor="ctr"/>
+          <a:lstStyle/>
+          <a:p>
+            <a:pPr algn="ctr"/>
+          </a:p>
+        </p:txBody>
+      </p:sp>
+      <p:sp>
+        <p:nvSpPr>
+          <p:cNvPr id="3" name="Rectangle 2"/>
+          <p:cNvSpPr/>
+          <p:nvPr/>
+        </p:nvSpPr>
+        <p:spPr>
+          <a:xfrm>
+            <a:off x="0" y="0"/>
+            <a:ext cx="73152" cy="6858000"/>
+          </a:xfrm>
+          <a:prstGeom prst="rect">
+            <a:avLst/>
+          </a:prstGeom>
+          <a:solidFill>
+            <a:srgbClr val="B0893E"/>
+          </a:solidFill>
+          <a:ln>
+            <a:noFill/>
+          </a:ln>
+        </p:spPr>
+        <p:style>
+          <a:lnRef idx="1">
+            <a:schemeClr val="accent1"/>
+          </a:lnRef>
+          <a:fillRef idx="3">
+            <a:schemeClr val="accent1"/>
+          </a:fillRef>
+          <a:effectRef idx="2">
+            <a:schemeClr val="accent1"/>
+          </a:effectRef>
+          <a:fontRef idx="minor">
+            <a:schemeClr val="lt1"/>
+          </a:fontRef>
+        </p:style>
+        <p:txBody>
+          <a:bodyPr rtlCol="0" anchor="ctr"/>
+          <a:lstStyle/>
+          <a:p>
+            <a:pPr algn="ctr"/>
+          </a:p>
+        </p:txBody>
+      </p:sp>
+      <p:sp>
+        <p:nvSpPr>
+          <p:cNvPr id="4" name="TextBox 3"/>
+          <p:cNvSpPr txBox="1"/>
+          <p:nvPr/>
+        </p:nvSpPr>
+        <p:spPr>
+          <a:xfrm>
+            <a:off x="365760" y="164592"/>
+            <a:ext cx="8412480" cy="256032"/>
+          </a:xfrm>
+          <a:prstGeom prst="rect">
+            <a:avLst/>
+          </a:prstGeom>
+          <a:noFill/>
+        </p:spPr>
+        <p:txBody>
+          <a:bodyPr wrap="square">
+            <a:spAutoFit/>
+          </a:bodyPr>
+          <a:lstStyle/>
+          <a:p>
+            <a:pPr algn="l"/>
+            <a:r>
+              <a:rPr sz="1000" b="0">
+                <a:solidFill>
+                  <a:srgbClr val="B0893E"/>
+                </a:solidFill>
+                <a:latin typeface="Calibri"/>
+              </a:rPr>
+              <a:t>EVIDENCE ROOM — AP AGENT OS   ·   12:45</a:t>
+            </a:r>
+          </a:p>
+        </p:txBody>
+      </p:sp>
+      <p:sp>
+        <p:nvSpPr>
+          <p:cNvPr id="5" name="TextBox 4"/>
+          <p:cNvSpPr txBox="1"/>
+          <p:nvPr/>
+        </p:nvSpPr>
+        <p:spPr>
+          <a:xfrm>
+            <a:off x="365760" y="502920"/>
+            <a:ext cx="8412480" cy="731520"/>
+          </a:xfrm>
+          <a:prstGeom prst="rect">
+            <a:avLst/>
+          </a:prstGeom>
+          <a:noFill/>
+        </p:spPr>
+        <p:txBody>
+          <a:bodyPr wrap="square">
+            <a:spAutoFit/>
+          </a:bodyPr>
+          <a:lstStyle/>
+          <a:p>
+            <a:pPr algn="l"/>
+            <a:r>
+              <a:rPr sz="2600" b="0">
+                <a:solidFill>
+                  <a:srgbClr val="12160F"/>
+                </a:solidFill>
+                <a:latin typeface="Georgia"/>
+              </a:rPr>
+              <a:t>Holds review with Controller / Treasury</a:t>
+            </a:r>
+          </a:p>
+        </p:txBody>
+      </p:sp>
+      <p:sp>
+        <p:nvSpPr>
+          <p:cNvPr id="6" name="TextBox 5"/>
+          <p:cNvSpPr txBox="1"/>
+          <p:nvPr/>
+        </p:nvSpPr>
+        <p:spPr>
+          <a:xfrm>
+            <a:off x="365760" y="1371600"/>
+            <a:ext cx="8321040" cy="4937760"/>
+          </a:xfrm>
+          <a:prstGeom prst="rect">
+            <a:avLst/>
+          </a:prstGeom>
+          <a:noFill/>
+        </p:spPr>
+        <p:txBody>
+          <a:bodyPr wrap="square">
+            <a:spAutoFit/>
+          </a:bodyPr>
+          <a:lstStyle/>
+          <a:p>
+            <a:pPr>
+              <a:spcAft>
+                <a:spcPts val="800"/>
+              </a:spcAft>
+            </a:pPr>
+            <a:r>
+              <a:rPr sz="1600">
+                <a:solidFill>
+                  <a:srgbClr val="12160F"/>
+                </a:solidFill>
+                <a:latin typeface="Calibri"/>
+              </a:rPr>
+              <a:t>·  Walk C1 (dual humans on payment), C2 (vendor-bank), dummy GR, DOA climb.</a:t>
+            </a:r>
+          </a:p>
+          <a:p>
+            <a:pPr>
+              <a:spcAft>
+                <a:spcPts val="800"/>
+              </a:spcAft>
+            </a:pPr>
+            <a:r>
+              <a:rPr sz="1600">
+                <a:solidFill>
+                  <a:srgbClr val="12160F"/>
+                </a:solidFill>
+                <a:latin typeface="Calibri"/>
+              </a:rPr>
+              <a:t>·  Write used / documented / absent.</a:t>
+            </a:r>
+          </a:p>
+          <a:p>
+            <a:pPr>
+              <a:spcAft>
+                <a:spcPts val="800"/>
+              </a:spcAft>
+            </a:pPr>
+            <a:r>
+              <a:rPr sz="1600">
+                <a:solidFill>
+                  <a:srgbClr val="12160F"/>
+                </a:solidFill>
+                <a:latin typeface="Calibri"/>
+              </a:rPr>
+              <a:t>·  If C1 absent: afternoon charters are L0 only; Agent 12 card is marked CLOSED.</a:t>
+            </a:r>
+          </a:p>
+          <a:p>
+            <a:pPr>
+              <a:spcAft>
+                <a:spcPts val="800"/>
+              </a:spcAft>
+            </a:pPr>
+            <a:r>
+              <a:rPr sz="1600">
+                <a:solidFill>
+                  <a:srgbClr val="12160F"/>
+                </a:solidFill>
+                <a:latin typeface="Calibri"/>
+              </a:rPr>
+              <a:t>·  Do not move holds to an email if the Controller only has 45 minutes.</a:t>
+            </a:r>
+          </a:p>
+        </p:txBody>
+      </p:sp>
+    </p:spTree>
+  </p:cSld>
+  <p:clrMapOvr>
+    <a:masterClrMapping/>
+  </p:clrMapOvr>
+</p:sld>
+</file>
+
+<file path=ppt/slides/slide8.xml><?xml version="1.0" encoding="utf-8"?>
+<p:sld xmlns:a="http://schemas.openxmlformats.org/drawingml/2006/main" xmlns:p="http://schemas.openxmlformats.org/presentationml/2006/main" xmlns:r="http://schemas.openxmlformats.org/officeDocument/2006/relationships">
+  <p:cSld>
+    <p:spTree>
+      <p:nvGrpSpPr>
+        <p:cNvPr id="1" name=""/>
+        <p:cNvGrpSpPr/>
+        <p:nvPr/>
+      </p:nvGrpSpPr>
+      <p:grpSpPr/>
+      <p:sp>
+        <p:nvSpPr>
+          <p:cNvPr id="2" name="Rectangle 1"/>
+          <p:cNvSpPr/>
+          <p:nvPr/>
+        </p:nvSpPr>
+        <p:spPr>
+          <a:xfrm>
+            <a:off x="0" y="0"/>
+            <a:ext cx="9144000" cy="6858000"/>
+          </a:xfrm>
+          <a:prstGeom prst="rect">
+            <a:avLst/>
+          </a:prstGeom>
+          <a:solidFill>
+            <a:srgbClr val="F3EEE4"/>
+          </a:solidFill>
+          <a:ln>
+            <a:noFill/>
+          </a:ln>
+        </p:spPr>
+        <p:style>
+          <a:lnRef idx="1">
+            <a:schemeClr val="accent1"/>
+          </a:lnRef>
+          <a:fillRef idx="3">
+            <a:schemeClr val="accent1"/>
+          </a:fillRef>
+          <a:effectRef idx="2">
+            <a:schemeClr val="accent1"/>
+          </a:effectRef>
+          <a:fontRef idx="minor">
+            <a:schemeClr val="lt1"/>
+          </a:fontRef>
+        </p:style>
+        <p:txBody>
+          <a:bodyPr rtlCol="0" anchor="ctr"/>
+          <a:lstStyle/>
+          <a:p>
+            <a:pPr algn="ctr"/>
+          </a:p>
+        </p:txBody>
+      </p:sp>
+      <p:sp>
+        <p:nvSpPr>
+          <p:cNvPr id="3" name="Rectangle 2"/>
+          <p:cNvSpPr/>
+          <p:nvPr/>
+        </p:nvSpPr>
+        <p:spPr>
+          <a:xfrm>
+            <a:off x="0" y="0"/>
+            <a:ext cx="73152" cy="6858000"/>
+          </a:xfrm>
+          <a:prstGeom prst="rect">
+            <a:avLst/>
+          </a:prstGeom>
+          <a:solidFill>
+            <a:srgbClr val="B0893E"/>
+          </a:solidFill>
+          <a:ln>
+            <a:noFill/>
+          </a:ln>
+        </p:spPr>
+        <p:style>
+          <a:lnRef idx="1">
+            <a:schemeClr val="accent1"/>
+          </a:lnRef>
+          <a:fillRef idx="3">
+            <a:schemeClr val="accent1"/>
+          </a:fillRef>
+          <a:effectRef idx="2">
+            <a:schemeClr val="accent1"/>
+          </a:effectRef>
+          <a:fontRef idx="minor">
+            <a:schemeClr val="lt1"/>
+          </a:fontRef>
+        </p:style>
+        <p:txBody>
+          <a:bodyPr rtlCol="0" anchor="ctr"/>
+          <a:lstStyle/>
+          <a:p>
+            <a:pPr algn="ctr"/>
+          </a:p>
+        </p:txBody>
+      </p:sp>
+      <p:sp>
+        <p:nvSpPr>
+          <p:cNvPr id="4" name="TextBox 3"/>
+          <p:cNvSpPr txBox="1"/>
+          <p:nvPr/>
+        </p:nvSpPr>
+        <p:spPr>
+          <a:xfrm>
+            <a:off x="365760" y="164592"/>
+            <a:ext cx="8412480" cy="256032"/>
+          </a:xfrm>
+          <a:prstGeom prst="rect">
+            <a:avLst/>
+          </a:prstGeom>
+          <a:noFill/>
+        </p:spPr>
+        <p:txBody>
+          <a:bodyPr wrap="square">
+            <a:spAutoFit/>
+          </a:bodyPr>
+          <a:lstStyle/>
+          <a:p>
+            <a:pPr algn="l"/>
+            <a:r>
+              <a:rPr sz="1000" b="0">
+                <a:solidFill>
+                  <a:srgbClr val="B0893E"/>
+                </a:solidFill>
+                <a:latin typeface="Calibri"/>
+              </a:rPr>
+              <a:t>EVIDENCE ROOM — AP AGENT OS   ·   13:15</a:t>
+            </a:r>
+          </a:p>
+        </p:txBody>
+      </p:sp>
+      <p:sp>
+        <p:nvSpPr>
+          <p:cNvPr id="5" name="TextBox 4"/>
+          <p:cNvSpPr txBox="1"/>
+          <p:nvPr/>
+        </p:nvSpPr>
+        <p:spPr>
+          <a:xfrm>
+            <a:off x="365760" y="502920"/>
+            <a:ext cx="8412480" cy="731520"/>
+          </a:xfrm>
+          <a:prstGeom prst="rect">
+            <a:avLst/>
+          </a:prstGeom>
+          <a:noFill/>
+        </p:spPr>
+        <p:txBody>
+          <a:bodyPr wrap="square">
+            <a:spAutoFit/>
+          </a:bodyPr>
+          <a:lstStyle/>
+          <a:p>
+            <a:pPr algn="l"/>
+            <a:r>
+              <a:rPr sz="2600" b="0">
+                <a:solidFill>
+                  <a:srgbClr val="12160F"/>
+                </a:solidFill>
+                <a:latin typeface="Georgia"/>
+              </a:rPr>
+              <a:t>Exercise 3 — Wave 1 charters</a:t>
+            </a:r>
+          </a:p>
+        </p:txBody>
+      </p:sp>
+      <p:sp>
+        <p:nvSpPr>
+          <p:cNvPr id="6" name="TextBox 5"/>
+          <p:cNvSpPr txBox="1"/>
+          <p:nvPr/>
+        </p:nvSpPr>
+        <p:spPr>
+          <a:xfrm>
+            <a:off x="365760" y="1371600"/>
+            <a:ext cx="8321040" cy="4937760"/>
+          </a:xfrm>
+          <a:prstGeom prst="rect">
+            <a:avLst/>
+          </a:prstGeom>
+          <a:noFill/>
+        </p:spPr>
+        <p:txBody>
+          <a:bodyPr wrap="square">
+            <a:spAutoFit/>
+          </a:bodyPr>
+          <a:lstStyle/>
+          <a:p>
+            <a:pPr>
+              <a:spcAft>
+                <a:spcPts val="800"/>
+              </a:spcAft>
+            </a:pPr>
+            <a:r>
+              <a:rPr sz="1600">
+                <a:solidFill>
+                  <a:srgbClr val="12160F"/>
+                </a:solidFill>
+                <a:latin typeface="Calibri"/>
+              </a:rPr>
+              <a:t>·  Stations for agents 01, 02, 03, 04, 10, 16.</a:t>
+            </a:r>
+          </a:p>
+          <a:p>
+            <a:pPr>
+              <a:spcAft>
+                <a:spcPts val="800"/>
+              </a:spcAft>
+            </a:pPr>
+            <a:r>
+              <a:rPr sz="1600">
+                <a:solidFill>
+                  <a:srgbClr val="12160F"/>
+                </a:solidFill>
+                <a:latin typeface="Calibri"/>
+              </a:rPr>
+              <a:t>·  Owner, object types, packet, exclusions, starting level (L0 or L1).</a:t>
+            </a:r>
+          </a:p>
+          <a:p>
+            <a:pPr>
+              <a:spcAft>
+                <a:spcPts val="800"/>
+              </a:spcAft>
+            </a:pPr>
+            <a:r>
+              <a:rPr sz="1600">
+                <a:solidFill>
+                  <a:srgbClr val="12160F"/>
+                </a:solidFill>
+                <a:latin typeface="Calibri"/>
+              </a:rPr>
+              <a:t>·  Exclusions read aloud. Payment is never in scope.</a:t>
+            </a:r>
+          </a:p>
+          <a:p>
+            <a:pPr>
+              <a:spcAft>
+                <a:spcPts val="800"/>
+              </a:spcAft>
+            </a:pPr>
+            <a:r>
+              <a:rPr sz="1600">
+                <a:solidFill>
+                  <a:srgbClr val="12160F"/>
+                </a:solidFill>
+                <a:latin typeface="Calibri"/>
+              </a:rPr>
+              <a:t>·  VACANT is an acceptable owner. Inventing an owner is not.</a:t>
+            </a:r>
+          </a:p>
+        </p:txBody>
+      </p:sp>
+    </p:spTree>
+  </p:cSld>
+  <p:clrMapOvr>
+    <a:masterClrMapping/>
+  </p:clrMapOvr>
+</p:sld>
+</file>
+
+<file path=ppt/slides/slide9.xml><?xml version="1.0" encoding="utf-8"?>
+<p:sld xmlns:a="http://schemas.openxmlformats.org/drawingml/2006/main" xmlns:p="http://schemas.openxmlformats.org/presentationml/2006/main" xmlns:r="http://schemas.openxmlformats.org/officeDocument/2006/relationships">
+  <p:cSld>
+    <p:spTree>
+      <p:nvGrpSpPr>
+        <p:cNvPr id="1" name=""/>
+        <p:cNvGrpSpPr/>
+        <p:nvPr/>
+      </p:nvGrpSpPr>
+      <p:grpSpPr/>
+      <p:sp>
+        <p:nvSpPr>
+          <p:cNvPr id="2" name="Rectangle 1"/>
+          <p:cNvSpPr/>
+          <p:nvPr/>
+        </p:nvSpPr>
+        <p:spPr>
+          <a:xfrm>
+            <a:off x="0" y="0"/>
+            <a:ext cx="9144000" cy="6858000"/>
+          </a:xfrm>
+          <a:prstGeom prst="rect">
+            <a:avLst/>
+          </a:prstGeom>
+          <a:solidFill>
+            <a:srgbClr val="F3EEE4"/>
+          </a:solidFill>
+          <a:ln>
+            <a:noFill/>
+          </a:ln>
+        </p:spPr>
+        <p:style>
+          <a:lnRef idx="1">
+            <a:schemeClr val="accent1"/>
+          </a:lnRef>
+          <a:fillRef idx="3">
+            <a:schemeClr val="accent1"/>
+          </a:fillRef>
+          <a:effectRef idx="2">
+            <a:schemeClr val="accent1"/>
+          </a:effectRef>
+          <a:fontRef idx="minor">
+            <a:schemeClr val="lt1"/>
+          </a:fontRef>
+        </p:style>
+        <p:txBody>
+          <a:bodyPr rtlCol="0" anchor="ctr"/>
+          <a:lstStyle/>
+          <a:p>
+            <a:pPr algn="ctr"/>
+          </a:p>
+        </p:txBody>
+      </p:sp>
+      <p:sp>
+        <p:nvSpPr>
+          <p:cNvPr id="3" name="Rectangle 2"/>
+          <p:cNvSpPr/>
+          <p:nvPr/>
+        </p:nvSpPr>
+        <p:spPr>
+          <a:xfrm>
+            <a:off x="0" y="0"/>
+            <a:ext cx="73152" cy="6858000"/>
+          </a:xfrm>
+          <a:prstGeom prst="rect">
+            <a:avLst/>
+          </a:prstGeom>
+          <a:solidFill>
+            <a:srgbClr val="B0893E"/>
+          </a:solidFill>
+          <a:ln>
+            <a:noFill/>
+          </a:ln>
+        </p:spPr>
+        <p:style>
+          <a:lnRef idx="1">
+            <a:schemeClr val="accent1"/>
+          </a:lnRef>
+          <a:fillRef idx="3">
+            <a:schemeClr val="accent1"/>
+          </a:fillRef>
+          <a:effectRef idx="2">
+            <a:schemeClr val="accent1"/>
+          </a:effectRef>
+          <a:fontRef idx="minor">
+            <a:schemeClr val="lt1"/>
+          </a:fontRef>
+        </p:style>
+        <p:txBody>
+          <a:bodyPr rtlCol="0" anchor="ctr"/>
+          <a:lstStyle/>
+          <a:p>
+            <a:pPr algn="ctr"/>
+          </a:p>
+        </p:txBody>
+      </p:sp>
+      <p:sp>
+        <p:nvSpPr>
+          <p:cNvPr id="4" name="TextBox 3"/>
+          <p:cNvSpPr txBox="1"/>
+          <p:nvPr/>
+        </p:nvSpPr>
+        <p:spPr>
+          <a:xfrm>
+            <a:off x="365760" y="164592"/>
+            <a:ext cx="8412480" cy="256032"/>
+          </a:xfrm>
+          <a:prstGeom prst="rect">
+            <a:avLst/>
+          </a:prstGeom>
+          <a:noFill/>
+        </p:spPr>
+        <p:txBody>
+          <a:bodyPr wrap="square">
+            <a:spAutoFit/>
+          </a:bodyPr>
+          <a:lstStyle/>
+          <a:p>
+            <a:pPr algn="l"/>
+            <a:r>
+              <a:rPr sz="1000" b="0">
+                <a:solidFill>
+                  <a:srgbClr val="B0893E"/>
+                </a:solidFill>
+                <a:latin typeface="Calibri"/>
+              </a:rPr>
+              <a:t>EVIDENCE ROOM — AP AGENT OS   ·   15:00</a:t>
+            </a:r>
+          </a:p>
+        </p:txBody>
+      </p:sp>
+      <p:sp>
+        <p:nvSpPr>
+          <p:cNvPr id="5" name="TextBox 4"/>
+          <p:cNvSpPr txBox="1"/>
+          <p:nvPr/>
+        </p:nvSpPr>
+        <p:spPr>
+          <a:xfrm>
+            <a:off x="365760" y="502920"/>
+            <a:ext cx="8412480" cy="731520"/>
+          </a:xfrm>
+          <a:prstGeom prst="rect">
+            <a:avLst/>
+          </a:prstGeom>
+          <a:noFill/>
+        </p:spPr>
+        <p:txBody>
+          <a:bodyPr wrap="square">
+            <a:spAutoFit/>
+          </a:bodyPr>
+          <a:lstStyle/>
+          <a:p>
+            <a:pPr algn="l"/>
+            <a:r>
+              <a:rPr sz="2600" b="0">
+                <a:solidFill>
+                  <a:srgbClr val="12160F"/>
+                </a:solidFill>
+                <a:latin typeface="Georgia"/>
+              </a:rPr>
+              <a:t>Exercise 4 — Shadow design</a:t>
+            </a:r>
+          </a:p>
+        </p:txBody>
+      </p:sp>
+      <p:sp>
+        <p:nvSpPr>
+          <p:cNvPr id="6" name="TextBox 5"/>
+          <p:cNvSpPr txBox="1"/>
+          <p:nvPr/>
+        </p:nvSpPr>
+        <p:spPr>
+          <a:xfrm>
+            <a:off x="365760" y="1371600"/>
+            <a:ext cx="8321040" cy="4937760"/>
+          </a:xfrm>
+          <a:prstGeom prst="rect">
+            <a:avLst/>
+          </a:prstGeom>
+          <a:noFill/>
+        </p:spPr>
+        <p:txBody>
+          <a:bodyPr wrap="square">
+            <a:spAutoFit/>
+          </a:bodyPr>
+          <a:lstStyle/>
+          <a:p>
+            <a:pPr>
+              <a:spcAft>
+                <a:spcPts val="800"/>
+              </a:spcAft>
+            </a:pPr>
+            <a:r>
+              <a:rPr sz="1600">
+                <a:solidFill>
+                  <a:srgbClr val="12160F"/>
+                </a:solidFill>
+                <a:latin typeface="Calibri"/>
+              </a:rPr>
+              <a:t>·  Coverage, sample sizes, language sample, rollback, operator huddle date.</a:t>
+            </a:r>
+          </a:p>
+          <a:p>
+            <a:pPr>
+              <a:spcAft>
+                <a:spcPts val="800"/>
+              </a:spcAft>
+            </a:pPr>
+            <a:r>
+              <a:rPr sz="1600">
+                <a:solidFill>
+                  <a:srgbClr val="12160F"/>
+                </a:solidFill>
+                <a:latin typeface="Calibri"/>
+              </a:rPr>
+              <a:t>·  Shadow is L0: no action permissions.</a:t>
+            </a:r>
+          </a:p>
+          <a:p>
+            <a:pPr>
+              <a:spcAft>
+                <a:spcPts val="800"/>
+              </a:spcAft>
+            </a:pPr>
+            <a:r>
+              <a:rPr sz="1600">
+                <a:solidFill>
+                  <a:srgbClr val="12160F"/>
+                </a:solidFill>
+                <a:latin typeface="Calibri"/>
+              </a:rPr>
+              <a:t>·  Output: two-week calendar.</a:t>
+            </a:r>
+          </a:p>
+          <a:p>
+            <a:pPr>
+              <a:spcAft>
+                <a:spcPts val="800"/>
+              </a:spcAft>
+            </a:pPr>
+            <a:r>
+              <a:rPr sz="1600">
+                <a:solidFill>
+                  <a:srgbClr val="12160F"/>
+                </a:solidFill>
+                <a:latin typeface="Calibri"/>
+              </a:rPr>
+              <a:t>·  If the packet cannot be reconstructed in 90 days, do not promote.</a:t>
             </a:r>
           </a:p>
         </p:txBody>
